--- a/index/designs/y8-l8/l1-core-vocab/l1-core-vocab.pptx
+++ b/index/designs/y8-l8/l1-core-vocab/l1-core-vocab.pptx
@@ -2020,12 +2020,6 @@
               </a:rPr>
               <a:t>爱好</a:t>
             </a:r>
-            <a:pPr algn="ctr" indent="0" marL="0">
-              <a:spcBef>
-                <a:spcPts val="1000"/>
-              </a:spcBef>
-              <a:buNone/>
-            </a:pPr>
             <a:r>
               <a:rPr lang="en-US" sz="4600" b="1" dirty="0">
                 <a:solidFill>
@@ -2037,12 +2031,6 @@
               </a:rPr>
               <a:t>·</a:t>
             </a:r>
-            <a:pPr algn="ctr" indent="0" marL="0">
-              <a:spcBef>
-                <a:spcPts val="1000"/>
-              </a:spcBef>
-              <a:buNone/>
-            </a:pPr>
             <a:r>
               <a:rPr lang="en-US" sz="4600" dirty="0">
                 <a:solidFill>
@@ -2645,15 +2633,6 @@
               </a:rPr>
               <a:t>Using the frames on the right, write </a:t>
             </a:r>
-            <a:pPr algn="l" indent="0" marL="0">
-              <a:lnSpc>
-                <a:spcPts val="1283"/>
-              </a:lnSpc>
-              <a:spcAft>
-                <a:spcPts val="400"/>
-              </a:spcAft>
-              <a:buNone/>
-            </a:pPr>
             <a:r>
               <a:rPr lang="en-US" sz="950" b="1" dirty="0">
                 <a:solidFill>
@@ -2689,15 +2668,6 @@
               </a:rPr>
               <a:t>Swap in at least </a:t>
             </a:r>
-            <a:pPr algn="l" indent="0" marL="0">
-              <a:lnSpc>
-                <a:spcPts val="1283"/>
-              </a:lnSpc>
-              <a:spcAft>
-                <a:spcPts val="400"/>
-              </a:spcAft>
-              <a:buNone/>
-            </a:pPr>
             <a:r>
               <a:rPr lang="en-US" sz="950" b="1" dirty="0">
                 <a:solidFill>
@@ -2709,15 +2679,6 @@
               </a:rPr>
               <a:t>one 跟……一起</a:t>
             </a:r>
-            <a:pPr algn="l" indent="0" marL="0">
-              <a:lnSpc>
-                <a:spcPts val="1283"/>
-              </a:lnSpc>
-              <a:spcAft>
-                <a:spcPts val="400"/>
-              </a:spcAft>
-              <a:buNone/>
-            </a:pPr>
             <a:r>
               <a:rPr lang="en-US" sz="950" dirty="0">
                 <a:solidFill>
@@ -2753,15 +2714,6 @@
               </a:rPr>
               <a:t>Extension: add a second clause with </a:t>
             </a:r>
-            <a:pPr algn="l" indent="0" marL="0">
-              <a:lnSpc>
-                <a:spcPts val="1283"/>
-              </a:lnSpc>
-              <a:spcAft>
-                <a:spcPts val="400"/>
-              </a:spcAft>
-              <a:buNone/>
-            </a:pPr>
             <a:r>
               <a:rPr lang="en-US" sz="950" b="1" dirty="0">
                 <a:solidFill>
@@ -2773,15 +2725,6 @@
               </a:rPr>
               <a:t>一边……一边……</a:t>
             </a:r>
-            <a:pPr algn="l" indent="0" marL="0">
-              <a:lnSpc>
-                <a:spcPts val="1283"/>
-              </a:lnSpc>
-              <a:spcAft>
-                <a:spcPts val="400"/>
-              </a:spcAft>
-              <a:buNone/>
-            </a:pPr>
             <a:r>
               <a:rPr lang="en-US" sz="950" dirty="0">
                 <a:solidFill>
@@ -2817,15 +2760,6 @@
               </a:rPr>
               <a:t>Cold call: be ready to </a:t>
             </a:r>
-            <a:pPr algn="l" indent="0" marL="0">
-              <a:lnSpc>
-                <a:spcPts val="1283"/>
-              </a:lnSpc>
-              <a:spcAft>
-                <a:spcPts val="400"/>
-              </a:spcAft>
-              <a:buNone/>
-            </a:pPr>
             <a:r>
               <a:rPr lang="en-US" sz="950" b="1" dirty="0">
                 <a:solidFill>
@@ -2929,9 +2863,6 @@
               </a:rPr>
               <a:t>我喜欢</a:t>
             </a:r>
-            <a:pPr algn="l" indent="0" marL="0">
-              <a:buNone/>
-            </a:pPr>
             <a:r>
               <a:rPr lang="en-US" sz="1200" b="1" dirty="0">
                 <a:solidFill>
@@ -2943,9 +2874,6 @@
               </a:rPr>
               <a:t>___</a:t>
             </a:r>
-            <a:pPr algn="l" indent="0" marL="0">
-              <a:buNone/>
-            </a:pPr>
             <a:r>
               <a:rPr lang="en-US" sz="1200" dirty="0">
                 <a:solidFill>
@@ -3049,9 +2977,6 @@
               </a:rPr>
               <a:t>我喜欢跟朋友一起</a:t>
             </a:r>
-            <a:pPr algn="l" indent="0" marL="0">
-              <a:buNone/>
-            </a:pPr>
             <a:r>
               <a:rPr lang="en-US" sz="1200" b="1" dirty="0">
                 <a:solidFill>
@@ -3063,9 +2988,6 @@
               </a:rPr>
               <a:t>___</a:t>
             </a:r>
-            <a:pPr algn="l" indent="0" marL="0">
-              <a:buNone/>
-            </a:pPr>
             <a:r>
               <a:rPr lang="en-US" sz="1200" dirty="0">
                 <a:solidFill>
@@ -5176,6 +5098,75 @@
               </a:rPr>
               <a:t>1️⃣ Each student fills a </a:t>
             </a:r>
+            <a:r>
+              <a:rPr lang="en-US" sz="850" b="1" dirty="0">
+                <a:solidFill>
+                  <a:srgbClr val="1E2A38"/>
+                </a:solidFill>
+                <a:latin typeface="Noto Sans SC" pitchFamily="34" charset="0"/>
+                <a:ea typeface="Noto Sans SC" pitchFamily="34" charset="-122"/>
+                <a:cs typeface="Noto Sans SC" pitchFamily="34" charset="-120"/>
+              </a:rPr>
+              <a:t>3×3 grid</a:t>
+            </a:r>
+            <a:r>
+              <a:rPr lang="en-US" sz="850" dirty="0">
+                <a:solidFill>
+                  <a:srgbClr val="1E2A38"/>
+                </a:solidFill>
+                <a:latin typeface="Noto Sans SC" pitchFamily="34" charset="0"/>
+                <a:ea typeface="Noto Sans SC" pitchFamily="34" charset="-122"/>
+                <a:cs typeface="Noto Sans SC" pitchFamily="34" charset="-120"/>
+              </a:rPr>
+              <a:t> with today's </a:t>
+            </a:r>
+            <a:r>
+              <a:rPr lang="en-US" sz="850" b="1" dirty="0">
+                <a:solidFill>
+                  <a:srgbClr val="1E2A38"/>
+                </a:solidFill>
+                <a:latin typeface="Noto Sans SC" pitchFamily="34" charset="0"/>
+                <a:ea typeface="Noto Sans SC" pitchFamily="34" charset="-122"/>
+                <a:cs typeface="Noto Sans SC" pitchFamily="34" charset="-120"/>
+              </a:rPr>
+              <a:t>7 words</a:t>
+            </a:r>
+            <a:r>
+              <a:rPr lang="en-US" sz="850" dirty="0">
+                <a:solidFill>
+                  <a:srgbClr val="1E2A38"/>
+                </a:solidFill>
+                <a:latin typeface="Noto Sans SC" pitchFamily="34" charset="0"/>
+                <a:ea typeface="Noto Sans SC" pitchFamily="34" charset="-122"/>
+                <a:cs typeface="Noto Sans SC" pitchFamily="34" charset="-120"/>
+              </a:rPr>
+              <a:t> — their choice of squares, some repeat.</a:t>
+            </a:r>
+            <a:endParaRPr lang="en-US" sz="850" dirty="0"/>
+          </a:p>
+        </p:txBody>
+      </p:sp>
+      <p:sp>
+        <p:nvSpPr>
+          <p:cNvPr id="39" name="Text 37"/>
+          <p:cNvSpPr/>
+          <p:nvPr/>
+        </p:nvSpPr>
+        <p:spPr>
+          <a:xfrm>
+            <a:off x="3073301" y="1831925"/>
+            <a:ext cx="8705240" cy="140196"/>
+          </a:xfrm>
+          <a:prstGeom prst="rect">
+            <a:avLst/>
+          </a:prstGeom>
+          <a:noFill/>
+          <a:ln/>
+        </p:spPr>
+        <p:txBody>
+          <a:bodyPr wrap="square" lIns="0" tIns="0" rIns="0" bIns="0" rtlCol="0" anchor="t"/>
+          <a:lstStyle/>
+          <a:p>
             <a:pPr algn="l" indent="0" marL="0">
               <a:lnSpc>
                 <a:spcPts val="1105"/>
@@ -5183,6 +5174,17 @@
               <a:buNone/>
             </a:pPr>
             <a:r>
+              <a:rPr lang="en-US" sz="850" dirty="0">
+                <a:solidFill>
+                  <a:srgbClr val="1E2A38"/>
+                </a:solidFill>
+                <a:latin typeface="Noto Sans SC" pitchFamily="34" charset="0"/>
+                <a:ea typeface="Noto Sans SC" pitchFamily="34" charset="-122"/>
+                <a:cs typeface="Noto Sans SC" pitchFamily="34" charset="-120"/>
+              </a:rPr>
+              <a:t>2️⃣ Teacher calls out </a:t>
+            </a:r>
+            <a:r>
               <a:rPr lang="en-US" sz="850" b="1" dirty="0">
                 <a:solidFill>
                   <a:srgbClr val="1E2A38"/>
@@ -5191,8 +5193,44 @@
                 <a:ea typeface="Noto Sans SC" pitchFamily="34" charset="-122"/>
                 <a:cs typeface="Noto Sans SC" pitchFamily="34" charset="-120"/>
               </a:rPr>
-              <a:t>3×3 grid</a:t>
-            </a:r>
+              <a:t>English meanings or pinyin</a:t>
+            </a:r>
+            <a:r>
+              <a:rPr lang="en-US" sz="850" dirty="0">
+                <a:solidFill>
+                  <a:srgbClr val="1E2A38"/>
+                </a:solidFill>
+                <a:latin typeface="Noto Sans SC" pitchFamily="34" charset="0"/>
+                <a:ea typeface="Noto Sans SC" pitchFamily="34" charset="-122"/>
+                <a:cs typeface="Noto Sans SC" pitchFamily="34" charset="-120"/>
+              </a:rPr>
+              <a:t>, one at a time. Find &amp; cross off the matching 汉字 square.</a:t>
+            </a:r>
+            <a:endParaRPr lang="en-US" sz="850" dirty="0"/>
+          </a:p>
+        </p:txBody>
+      </p:sp>
+      <p:sp>
+        <p:nvSpPr>
+          <p:cNvPr id="40" name="Text 38"/>
+          <p:cNvSpPr/>
+          <p:nvPr/>
+        </p:nvSpPr>
+        <p:spPr>
+          <a:xfrm>
+            <a:off x="3073301" y="2022872"/>
+            <a:ext cx="8705240" cy="140196"/>
+          </a:xfrm>
+          <a:prstGeom prst="rect">
+            <a:avLst/>
+          </a:prstGeom>
+          <a:noFill/>
+          <a:ln/>
+        </p:spPr>
+        <p:txBody>
+          <a:bodyPr wrap="square" lIns="0" tIns="0" rIns="0" bIns="0" rtlCol="0" anchor="t"/>
+          <a:lstStyle/>
+          <a:p>
             <a:pPr algn="l" indent="0" marL="0">
               <a:lnSpc>
                 <a:spcPts val="1105"/>
@@ -5208,14 +5246,8 @@
                 <a:ea typeface="Noto Sans SC" pitchFamily="34" charset="-122"/>
                 <a:cs typeface="Noto Sans SC" pitchFamily="34" charset="-120"/>
               </a:rPr>
-              <a:t> with today's </a:t>
-            </a:r>
-            <a:pPr algn="l" indent="0" marL="0">
-              <a:lnSpc>
-                <a:spcPts val="1105"/>
-              </a:lnSpc>
-              <a:buNone/>
-            </a:pPr>
+              <a:t>3️⃣ </a:t>
+            </a:r>
             <a:r>
               <a:rPr lang="en-US" sz="850" b="1" dirty="0">
                 <a:solidFill>
@@ -5225,14 +5257,8 @@
                 <a:ea typeface="Noto Sans SC" pitchFamily="34" charset="-122"/>
                 <a:cs typeface="Noto Sans SC" pitchFamily="34" charset="-120"/>
               </a:rPr>
-              <a:t>7 words</a:t>
-            </a:r>
-            <a:pPr algn="l" indent="0" marL="0">
-              <a:lnSpc>
-                <a:spcPts val="1105"/>
-              </a:lnSpc>
-              <a:buNone/>
-            </a:pPr>
+              <a:t>Three in a row</a:t>
+            </a:r>
             <a:r>
               <a:rPr lang="en-US" sz="850" dirty="0">
                 <a:solidFill>
@@ -5242,41 +5268,10 @@
                 <a:ea typeface="Noto Sans SC" pitchFamily="34" charset="-122"/>
                 <a:cs typeface="Noto Sans SC" pitchFamily="34" charset="-120"/>
               </a:rPr>
-              <a:t> — their choice of squares, some repeat.</a:t>
-            </a:r>
-            <a:endParaRPr lang="en-US" sz="850" dirty="0"/>
-          </a:p>
-        </p:txBody>
-      </p:sp>
-      <p:sp>
-        <p:nvSpPr>
-          <p:cNvPr id="39" name="Text 37"/>
-          <p:cNvSpPr/>
-          <p:nvPr/>
-        </p:nvSpPr>
-        <p:spPr>
-          <a:xfrm>
-            <a:off x="3073301" y="1831925"/>
-            <a:ext cx="8705240" cy="140196"/>
-          </a:xfrm>
-          <a:prstGeom prst="rect">
-            <a:avLst/>
-          </a:prstGeom>
-          <a:noFill/>
-          <a:ln/>
-        </p:spPr>
-        <p:txBody>
-          <a:bodyPr wrap="square" lIns="0" tIns="0" rIns="0" bIns="0" rtlCol="0" anchor="t"/>
-          <a:lstStyle/>
-          <a:p>
-            <a:pPr algn="l" indent="0" marL="0">
-              <a:lnSpc>
-                <a:spcPts val="1105"/>
-              </a:lnSpc>
-              <a:buNone/>
-            </a:pPr>
-            <a:r>
-              <a:rPr lang="en-US" sz="850" dirty="0">
+              <a:t> (horizontal, vertical, or diagonal) — call out </a:t>
+            </a:r>
+            <a:r>
+              <a:rPr lang="en-US" sz="850" b="1" dirty="0">
                 <a:solidFill>
                   <a:srgbClr val="1E2A38"/>
                 </a:solidFill>
@@ -5284,141 +5279,8 @@
                 <a:ea typeface="Noto Sans SC" pitchFamily="34" charset="-122"/>
                 <a:cs typeface="Noto Sans SC" pitchFamily="34" charset="-120"/>
               </a:rPr>
-              <a:t>2️⃣ Teacher calls out </a:t>
-            </a:r>
-            <a:pPr algn="l" indent="0" marL="0">
-              <a:lnSpc>
-                <a:spcPts val="1105"/>
-              </a:lnSpc>
-              <a:buNone/>
-            </a:pPr>
-            <a:r>
-              <a:rPr lang="en-US" sz="850" b="1" dirty="0">
-                <a:solidFill>
-                  <a:srgbClr val="1E2A38"/>
-                </a:solidFill>
-                <a:latin typeface="Noto Sans SC" pitchFamily="34" charset="0"/>
-                <a:ea typeface="Noto Sans SC" pitchFamily="34" charset="-122"/>
-                <a:cs typeface="Noto Sans SC" pitchFamily="34" charset="-120"/>
-              </a:rPr>
-              <a:t>English meanings or pinyin</a:t>
-            </a:r>
-            <a:pPr algn="l" indent="0" marL="0">
-              <a:lnSpc>
-                <a:spcPts val="1105"/>
-              </a:lnSpc>
-              <a:buNone/>
-            </a:pPr>
-            <a:r>
-              <a:rPr lang="en-US" sz="850" dirty="0">
-                <a:solidFill>
-                  <a:srgbClr val="1E2A38"/>
-                </a:solidFill>
-                <a:latin typeface="Noto Sans SC" pitchFamily="34" charset="0"/>
-                <a:ea typeface="Noto Sans SC" pitchFamily="34" charset="-122"/>
-                <a:cs typeface="Noto Sans SC" pitchFamily="34" charset="-120"/>
-              </a:rPr>
-              <a:t>, one at a time. Find &amp; cross off the matching 汉字 square.</a:t>
-            </a:r>
-            <a:endParaRPr lang="en-US" sz="850" dirty="0"/>
-          </a:p>
-        </p:txBody>
-      </p:sp>
-      <p:sp>
-        <p:nvSpPr>
-          <p:cNvPr id="40" name="Text 38"/>
-          <p:cNvSpPr/>
-          <p:nvPr/>
-        </p:nvSpPr>
-        <p:spPr>
-          <a:xfrm>
-            <a:off x="3073301" y="2022872"/>
-            <a:ext cx="8705240" cy="140196"/>
-          </a:xfrm>
-          <a:prstGeom prst="rect">
-            <a:avLst/>
-          </a:prstGeom>
-          <a:noFill/>
-          <a:ln/>
-        </p:spPr>
-        <p:txBody>
-          <a:bodyPr wrap="square" lIns="0" tIns="0" rIns="0" bIns="0" rtlCol="0" anchor="t"/>
-          <a:lstStyle/>
-          <a:p>
-            <a:pPr algn="l" indent="0" marL="0">
-              <a:lnSpc>
-                <a:spcPts val="1105"/>
-              </a:lnSpc>
-              <a:buNone/>
-            </a:pPr>
-            <a:r>
-              <a:rPr lang="en-US" sz="850" dirty="0">
-                <a:solidFill>
-                  <a:srgbClr val="1E2A38"/>
-                </a:solidFill>
-                <a:latin typeface="Noto Sans SC" pitchFamily="34" charset="0"/>
-                <a:ea typeface="Noto Sans SC" pitchFamily="34" charset="-122"/>
-                <a:cs typeface="Noto Sans SC" pitchFamily="34" charset="-120"/>
-              </a:rPr>
-              <a:t>3️⃣ </a:t>
-            </a:r>
-            <a:pPr algn="l" indent="0" marL="0">
-              <a:lnSpc>
-                <a:spcPts val="1105"/>
-              </a:lnSpc>
-              <a:buNone/>
-            </a:pPr>
-            <a:r>
-              <a:rPr lang="en-US" sz="850" b="1" dirty="0">
-                <a:solidFill>
-                  <a:srgbClr val="1E2A38"/>
-                </a:solidFill>
-                <a:latin typeface="Noto Sans SC" pitchFamily="34" charset="0"/>
-                <a:ea typeface="Noto Sans SC" pitchFamily="34" charset="-122"/>
-                <a:cs typeface="Noto Sans SC" pitchFamily="34" charset="-120"/>
-              </a:rPr>
-              <a:t>Three in a row</a:t>
-            </a:r>
-            <a:pPr algn="l" indent="0" marL="0">
-              <a:lnSpc>
-                <a:spcPts val="1105"/>
-              </a:lnSpc>
-              <a:buNone/>
-            </a:pPr>
-            <a:r>
-              <a:rPr lang="en-US" sz="850" dirty="0">
-                <a:solidFill>
-                  <a:srgbClr val="1E2A38"/>
-                </a:solidFill>
-                <a:latin typeface="Noto Sans SC" pitchFamily="34" charset="0"/>
-                <a:ea typeface="Noto Sans SC" pitchFamily="34" charset="-122"/>
-                <a:cs typeface="Noto Sans SC" pitchFamily="34" charset="-120"/>
-              </a:rPr>
-              <a:t> (horizontal, vertical, or diagonal) — call out </a:t>
-            </a:r>
-            <a:pPr algn="l" indent="0" marL="0">
-              <a:lnSpc>
-                <a:spcPts val="1105"/>
-              </a:lnSpc>
-              <a:buNone/>
-            </a:pPr>
-            <a:r>
-              <a:rPr lang="en-US" sz="850" b="1" dirty="0">
-                <a:solidFill>
-                  <a:srgbClr val="1E2A38"/>
-                </a:solidFill>
-                <a:latin typeface="Noto Sans SC" pitchFamily="34" charset="0"/>
-                <a:ea typeface="Noto Sans SC" pitchFamily="34" charset="-122"/>
-                <a:cs typeface="Noto Sans SC" pitchFamily="34" charset="-120"/>
-              </a:rPr>
               <a:t>宾狗 (Bingo)</a:t>
             </a:r>
-            <a:pPr algn="l" indent="0" marL="0">
-              <a:lnSpc>
-                <a:spcPts val="1105"/>
-              </a:lnSpc>
-              <a:buNone/>
-            </a:pPr>
             <a:r>
               <a:rPr lang="en-US" sz="850" dirty="0">
                 <a:solidFill>
@@ -6600,12 +6462,6 @@
               <a:t>Student volunteer reads each success criterion aloud — class responds with the target word or sentence.
 </a:t>
             </a:r>
-            <a:pPr algn="l" indent="0" marL="0">
-              <a:lnSpc>
-                <a:spcPts val="1305"/>
-              </a:lnSpc>
-              <a:buNone/>
-            </a:pPr>
             <a:r>
               <a:rPr lang="en-US" sz="900" b="1" dirty="0">
                 <a:solidFill>
@@ -6617,12 +6473,6 @@
               </a:rPr>
               <a:t>Self-assess with thumbs</a:t>
             </a:r>
-            <a:pPr algn="l" indent="0" marL="0">
-              <a:lnSpc>
-                <a:spcPts val="1305"/>
-              </a:lnSpc>
-              <a:buNone/>
-            </a:pPr>
             <a:r>
               <a:rPr lang="en-US" sz="900" dirty="0">
                 <a:solidFill>
@@ -7769,15 +7619,6 @@
               </a:rPr>
               <a:t>Teacher shows a </a:t>
             </a:r>
-            <a:pPr algn="l" indent="0" marL="0">
-              <a:lnSpc>
-                <a:spcPts val="1470"/>
-              </a:lnSpc>
-              <a:spcAft>
-                <a:spcPts val="500"/>
-              </a:spcAft>
-              <a:buNone/>
-            </a:pPr>
             <a:r>
               <a:rPr lang="en-US" sz="1050" b="1" dirty="0">
                 <a:solidFill>
@@ -7789,15 +7630,6 @@
               </a:rPr>
               <a:t>Lesson 7 word</a:t>
             </a:r>
-            <a:pPr algn="l" indent="0" marL="0">
-              <a:lnSpc>
-                <a:spcPts val="1470"/>
-              </a:lnSpc>
-              <a:spcAft>
-                <a:spcPts val="500"/>
-              </a:spcAft>
-              <a:buNone/>
-            </a:pPr>
             <a:r>
               <a:rPr lang="en-US" sz="1050" dirty="0">
                 <a:solidFill>
@@ -7833,15 +7665,6 @@
               </a:rPr>
               <a:t>Reverse: teacher says an </a:t>
             </a:r>
-            <a:pPr algn="l" indent="0" marL="0">
-              <a:lnSpc>
-                <a:spcPts val="1470"/>
-              </a:lnSpc>
-              <a:spcAft>
-                <a:spcPts val="500"/>
-              </a:spcAft>
-              <a:buNone/>
-            </a:pPr>
             <a:r>
               <a:rPr lang="en-US" sz="1050" b="1" dirty="0">
                 <a:solidFill>
@@ -7853,15 +7676,6 @@
               </a:rPr>
               <a:t>English hobby</a:t>
             </a:r>
-            <a:pPr algn="l" indent="0" marL="0">
-              <a:lnSpc>
-                <a:spcPts val="1470"/>
-              </a:lnSpc>
-              <a:spcAft>
-                <a:spcPts val="500"/>
-              </a:spcAft>
-              <a:buNone/>
-            </a:pPr>
             <a:r>
               <a:rPr lang="en-US" sz="1050" dirty="0">
                 <a:solidFill>
@@ -7989,6 +7803,31 @@
               </a:rPr>
               <a:t>弹钢琴</a:t>
             </a:r>
+            <a:r>
+              <a:rPr lang="en-US" sz="1000" dirty="0">
+                <a:solidFill>
+                  <a:srgbClr val="1E2A38"/>
+                </a:solidFill>
+                <a:latin typeface="Noto Sans SC" pitchFamily="34" charset="0"/>
+                <a:ea typeface="Noto Sans SC" pitchFamily="34" charset="-122"/>
+                <a:cs typeface="Noto Sans SC" pitchFamily="34" charset="-120"/>
+              </a:rPr>
+              <a:t> </a:t>
+            </a:r>
+            <a:r>
+              <a:rPr lang="en-US" sz="850" dirty="0">
+                <a:solidFill>
+                  <a:srgbClr val="8B94A3"/>
+                </a:solidFill>
+                <a:latin typeface="Noto Sans SC" pitchFamily="34" charset="0"/>
+                <a:ea typeface="Noto Sans SC" pitchFamily="34" charset="-122"/>
+                <a:cs typeface="Noto Sans SC" pitchFamily="34" charset="-120"/>
+              </a:rPr>
+              <a:t>play the piano</a:t>
+            </a:r>
+            <a:endParaRPr lang="en-US" sz="1000" dirty="0"/>
+          </a:p>
+          <a:p>
             <a:pPr algn="l" indent="0" marL="0">
               <a:lnSpc>
                 <a:spcPts val="1600"/>
@@ -7996,6 +7835,17 @@
               <a:buNone/>
             </a:pPr>
             <a:r>
+              <a:rPr lang="en-US" sz="1000" b="1" dirty="0">
+                <a:solidFill>
+                  <a:srgbClr val="1E2A38"/>
+                </a:solidFill>
+                <a:latin typeface="Noto Sans SC" pitchFamily="34" charset="0"/>
+                <a:ea typeface="Noto Sans SC" pitchFamily="34" charset="-122"/>
+                <a:cs typeface="Noto Sans SC" pitchFamily="34" charset="-120"/>
+              </a:rPr>
+              <a:t>唱歌</a:t>
+            </a:r>
+            <a:r>
               <a:rPr lang="en-US" sz="1000" dirty="0">
                 <a:solidFill>
                   <a:srgbClr val="1E2A38"/>
@@ -8006,6 +7856,20 @@
               </a:rPr>
               <a:t> </a:t>
             </a:r>
+            <a:r>
+              <a:rPr lang="en-US" sz="850" dirty="0">
+                <a:solidFill>
+                  <a:srgbClr val="8B94A3"/>
+                </a:solidFill>
+                <a:latin typeface="Noto Sans SC" pitchFamily="34" charset="0"/>
+                <a:ea typeface="Noto Sans SC" pitchFamily="34" charset="-122"/>
+                <a:cs typeface="Noto Sans SC" pitchFamily="34" charset="-120"/>
+              </a:rPr>
+              <a:t>sing a song</a:t>
+            </a:r>
+            <a:endParaRPr lang="en-US" sz="1000" dirty="0"/>
+          </a:p>
+          <a:p>
             <a:pPr algn="l" indent="0" marL="0">
               <a:lnSpc>
                 <a:spcPts val="1600"/>
@@ -8013,6 +7877,28 @@
               <a:buNone/>
             </a:pPr>
             <a:r>
+              <a:rPr lang="en-US" sz="1000" b="1" dirty="0">
+                <a:solidFill>
+                  <a:srgbClr val="1E2A38"/>
+                </a:solidFill>
+                <a:latin typeface="Noto Sans SC" pitchFamily="34" charset="0"/>
+                <a:ea typeface="Noto Sans SC" pitchFamily="34" charset="-122"/>
+                <a:cs typeface="Noto Sans SC" pitchFamily="34" charset="-120"/>
+              </a:rPr>
+              <a:t>听音乐</a:t>
+            </a:r>
+            <a:r>
+              <a:rPr lang="en-US" sz="1000" dirty="0">
+                <a:solidFill>
+                  <a:srgbClr val="1E2A38"/>
+                </a:solidFill>
+                <a:latin typeface="Noto Sans SC" pitchFamily="34" charset="0"/>
+                <a:ea typeface="Noto Sans SC" pitchFamily="34" charset="-122"/>
+                <a:cs typeface="Noto Sans SC" pitchFamily="34" charset="-120"/>
+              </a:rPr>
+              <a:t> </a:t>
+            </a:r>
+            <a:r>
               <a:rPr lang="en-US" sz="850" dirty="0">
                 <a:solidFill>
                   <a:srgbClr val="8B94A3"/>
@@ -8021,7 +7907,7 @@
                 <a:ea typeface="Noto Sans SC" pitchFamily="34" charset="-122"/>
                 <a:cs typeface="Noto Sans SC" pitchFamily="34" charset="-120"/>
               </a:rPr>
-              <a:t>play the piano</a:t>
+              <a:t>listen to music</a:t>
             </a:r>
             <a:endParaRPr lang="en-US" sz="1000" dirty="0"/>
           </a:p>
@@ -8041,8 +7927,33 @@
                 <a:ea typeface="Noto Sans SC" pitchFamily="34" charset="-122"/>
                 <a:cs typeface="Noto Sans SC" pitchFamily="34" charset="-120"/>
               </a:rPr>
-              <a:t>唱歌</a:t>
-            </a:r>
+              <a:t>读书</a:t>
+            </a:r>
+            <a:r>
+              <a:rPr lang="en-US" sz="1000" dirty="0">
+                <a:solidFill>
+                  <a:srgbClr val="1E2A38"/>
+                </a:solidFill>
+                <a:latin typeface="Noto Sans SC" pitchFamily="34" charset="0"/>
+                <a:ea typeface="Noto Sans SC" pitchFamily="34" charset="-122"/>
+                <a:cs typeface="Noto Sans SC" pitchFamily="34" charset="-120"/>
+              </a:rPr>
+              <a:t> </a:t>
+            </a:r>
+            <a:r>
+              <a:rPr lang="en-US" sz="850" dirty="0">
+                <a:solidFill>
+                  <a:srgbClr val="8B94A3"/>
+                </a:solidFill>
+                <a:latin typeface="Noto Sans SC" pitchFamily="34" charset="0"/>
+                <a:ea typeface="Noto Sans SC" pitchFamily="34" charset="-122"/>
+                <a:cs typeface="Noto Sans SC" pitchFamily="34" charset="-120"/>
+              </a:rPr>
+              <a:t>read / study</a:t>
+            </a:r>
+            <a:endParaRPr lang="en-US" sz="1000" dirty="0"/>
+          </a:p>
+          <a:p>
             <a:pPr algn="l" indent="0" marL="0">
               <a:lnSpc>
                 <a:spcPts val="1600"/>
@@ -8050,6 +7961,17 @@
               <a:buNone/>
             </a:pPr>
             <a:r>
+              <a:rPr lang="en-US" sz="1000" b="1" dirty="0">
+                <a:solidFill>
+                  <a:srgbClr val="1E2A38"/>
+                </a:solidFill>
+                <a:latin typeface="Noto Sans SC" pitchFamily="34" charset="0"/>
+                <a:ea typeface="Noto Sans SC" pitchFamily="34" charset="-122"/>
+                <a:cs typeface="Noto Sans SC" pitchFamily="34" charset="-120"/>
+              </a:rPr>
+              <a:t>都</a:t>
+            </a:r>
+            <a:r>
               <a:rPr lang="en-US" sz="1000" dirty="0">
                 <a:solidFill>
                   <a:srgbClr val="1E2A38"/>
@@ -8060,6 +7982,20 @@
               </a:rPr>
               <a:t> </a:t>
             </a:r>
+            <a:r>
+              <a:rPr lang="en-US" sz="850" dirty="0">
+                <a:solidFill>
+                  <a:srgbClr val="8B94A3"/>
+                </a:solidFill>
+                <a:latin typeface="Noto Sans SC" pitchFamily="34" charset="0"/>
+                <a:ea typeface="Noto Sans SC" pitchFamily="34" charset="-122"/>
+                <a:cs typeface="Noto Sans SC" pitchFamily="34" charset="-120"/>
+              </a:rPr>
+              <a:t>all / both</a:t>
+            </a:r>
+            <a:endParaRPr lang="en-US" sz="1000" dirty="0"/>
+          </a:p>
+          <a:p>
             <a:pPr algn="l" indent="0" marL="0">
               <a:lnSpc>
                 <a:spcPts val="1600"/>
@@ -8067,26 +8003,6 @@
               <a:buNone/>
             </a:pPr>
             <a:r>
-              <a:rPr lang="en-US" sz="850" dirty="0">
-                <a:solidFill>
-                  <a:srgbClr val="8B94A3"/>
-                </a:solidFill>
-                <a:latin typeface="Noto Sans SC" pitchFamily="34" charset="0"/>
-                <a:ea typeface="Noto Sans SC" pitchFamily="34" charset="-122"/>
-                <a:cs typeface="Noto Sans SC" pitchFamily="34" charset="-120"/>
-              </a:rPr>
-              <a:t>sing a song</a:t>
-            </a:r>
-            <a:endParaRPr lang="en-US" sz="1000" dirty="0"/>
-          </a:p>
-          <a:p>
-            <a:pPr algn="l" indent="0" marL="0">
-              <a:lnSpc>
-                <a:spcPts val="1600"/>
-              </a:lnSpc>
-              <a:buNone/>
-            </a:pPr>
-            <a:r>
               <a:rPr lang="en-US" sz="1000" b="1" dirty="0">
                 <a:solidFill>
                   <a:srgbClr val="1E2A38"/>
@@ -8095,14 +8011,8 @@
                 <a:ea typeface="Noto Sans SC" pitchFamily="34" charset="-122"/>
                 <a:cs typeface="Noto Sans SC" pitchFamily="34" charset="-120"/>
               </a:rPr>
-              <a:t>听音乐</a:t>
-            </a:r>
-            <a:pPr algn="l" indent="0" marL="0">
-              <a:lnSpc>
-                <a:spcPts val="1600"/>
-              </a:lnSpc>
-              <a:buNone/>
-            </a:pPr>
+              <a:t>正在</a:t>
+            </a:r>
             <a:r>
               <a:rPr lang="en-US" sz="1000" dirty="0">
                 <a:solidFill>
@@ -8114,174 +8024,6 @@
               </a:rPr>
               <a:t> </a:t>
             </a:r>
-            <a:pPr algn="l" indent="0" marL="0">
-              <a:lnSpc>
-                <a:spcPts val="1600"/>
-              </a:lnSpc>
-              <a:buNone/>
-            </a:pPr>
-            <a:r>
-              <a:rPr lang="en-US" sz="850" dirty="0">
-                <a:solidFill>
-                  <a:srgbClr val="8B94A3"/>
-                </a:solidFill>
-                <a:latin typeface="Noto Sans SC" pitchFamily="34" charset="0"/>
-                <a:ea typeface="Noto Sans SC" pitchFamily="34" charset="-122"/>
-                <a:cs typeface="Noto Sans SC" pitchFamily="34" charset="-120"/>
-              </a:rPr>
-              <a:t>listen to music</a:t>
-            </a:r>
-            <a:endParaRPr lang="en-US" sz="1000" dirty="0"/>
-          </a:p>
-          <a:p>
-            <a:pPr algn="l" indent="0" marL="0">
-              <a:lnSpc>
-                <a:spcPts val="1600"/>
-              </a:lnSpc>
-              <a:buNone/>
-            </a:pPr>
-            <a:r>
-              <a:rPr lang="en-US" sz="1000" b="1" dirty="0">
-                <a:solidFill>
-                  <a:srgbClr val="1E2A38"/>
-                </a:solidFill>
-                <a:latin typeface="Noto Sans SC" pitchFamily="34" charset="0"/>
-                <a:ea typeface="Noto Sans SC" pitchFamily="34" charset="-122"/>
-                <a:cs typeface="Noto Sans SC" pitchFamily="34" charset="-120"/>
-              </a:rPr>
-              <a:t>读书</a:t>
-            </a:r>
-            <a:pPr algn="l" indent="0" marL="0">
-              <a:lnSpc>
-                <a:spcPts val="1600"/>
-              </a:lnSpc>
-              <a:buNone/>
-            </a:pPr>
-            <a:r>
-              <a:rPr lang="en-US" sz="1000" dirty="0">
-                <a:solidFill>
-                  <a:srgbClr val="1E2A38"/>
-                </a:solidFill>
-                <a:latin typeface="Noto Sans SC" pitchFamily="34" charset="0"/>
-                <a:ea typeface="Noto Sans SC" pitchFamily="34" charset="-122"/>
-                <a:cs typeface="Noto Sans SC" pitchFamily="34" charset="-120"/>
-              </a:rPr>
-              <a:t> </a:t>
-            </a:r>
-            <a:pPr algn="l" indent="0" marL="0">
-              <a:lnSpc>
-                <a:spcPts val="1600"/>
-              </a:lnSpc>
-              <a:buNone/>
-            </a:pPr>
-            <a:r>
-              <a:rPr lang="en-US" sz="850" dirty="0">
-                <a:solidFill>
-                  <a:srgbClr val="8B94A3"/>
-                </a:solidFill>
-                <a:latin typeface="Noto Sans SC" pitchFamily="34" charset="0"/>
-                <a:ea typeface="Noto Sans SC" pitchFamily="34" charset="-122"/>
-                <a:cs typeface="Noto Sans SC" pitchFamily="34" charset="-120"/>
-              </a:rPr>
-              <a:t>read / study</a:t>
-            </a:r>
-            <a:endParaRPr lang="en-US" sz="1000" dirty="0"/>
-          </a:p>
-          <a:p>
-            <a:pPr algn="l" indent="0" marL="0">
-              <a:lnSpc>
-                <a:spcPts val="1600"/>
-              </a:lnSpc>
-              <a:buNone/>
-            </a:pPr>
-            <a:r>
-              <a:rPr lang="en-US" sz="1000" b="1" dirty="0">
-                <a:solidFill>
-                  <a:srgbClr val="1E2A38"/>
-                </a:solidFill>
-                <a:latin typeface="Noto Sans SC" pitchFamily="34" charset="0"/>
-                <a:ea typeface="Noto Sans SC" pitchFamily="34" charset="-122"/>
-                <a:cs typeface="Noto Sans SC" pitchFamily="34" charset="-120"/>
-              </a:rPr>
-              <a:t>都</a:t>
-            </a:r>
-            <a:pPr algn="l" indent="0" marL="0">
-              <a:lnSpc>
-                <a:spcPts val="1600"/>
-              </a:lnSpc>
-              <a:buNone/>
-            </a:pPr>
-            <a:r>
-              <a:rPr lang="en-US" sz="1000" dirty="0">
-                <a:solidFill>
-                  <a:srgbClr val="1E2A38"/>
-                </a:solidFill>
-                <a:latin typeface="Noto Sans SC" pitchFamily="34" charset="0"/>
-                <a:ea typeface="Noto Sans SC" pitchFamily="34" charset="-122"/>
-                <a:cs typeface="Noto Sans SC" pitchFamily="34" charset="-120"/>
-              </a:rPr>
-              <a:t> </a:t>
-            </a:r>
-            <a:pPr algn="l" indent="0" marL="0">
-              <a:lnSpc>
-                <a:spcPts val="1600"/>
-              </a:lnSpc>
-              <a:buNone/>
-            </a:pPr>
-            <a:r>
-              <a:rPr lang="en-US" sz="850" dirty="0">
-                <a:solidFill>
-                  <a:srgbClr val="8B94A3"/>
-                </a:solidFill>
-                <a:latin typeface="Noto Sans SC" pitchFamily="34" charset="0"/>
-                <a:ea typeface="Noto Sans SC" pitchFamily="34" charset="-122"/>
-                <a:cs typeface="Noto Sans SC" pitchFamily="34" charset="-120"/>
-              </a:rPr>
-              <a:t>all / both</a:t>
-            </a:r>
-            <a:endParaRPr lang="en-US" sz="1000" dirty="0"/>
-          </a:p>
-          <a:p>
-            <a:pPr algn="l" indent="0" marL="0">
-              <a:lnSpc>
-                <a:spcPts val="1600"/>
-              </a:lnSpc>
-              <a:buNone/>
-            </a:pPr>
-            <a:r>
-              <a:rPr lang="en-US" sz="1000" b="1" dirty="0">
-                <a:solidFill>
-                  <a:srgbClr val="1E2A38"/>
-                </a:solidFill>
-                <a:latin typeface="Noto Sans SC" pitchFamily="34" charset="0"/>
-                <a:ea typeface="Noto Sans SC" pitchFamily="34" charset="-122"/>
-                <a:cs typeface="Noto Sans SC" pitchFamily="34" charset="-120"/>
-              </a:rPr>
-              <a:t>正在</a:t>
-            </a:r>
-            <a:pPr algn="l" indent="0" marL="0">
-              <a:lnSpc>
-                <a:spcPts val="1600"/>
-              </a:lnSpc>
-              <a:buNone/>
-            </a:pPr>
-            <a:r>
-              <a:rPr lang="en-US" sz="1000" dirty="0">
-                <a:solidFill>
-                  <a:srgbClr val="1E2A38"/>
-                </a:solidFill>
-                <a:latin typeface="Noto Sans SC" pitchFamily="34" charset="0"/>
-                <a:ea typeface="Noto Sans SC" pitchFamily="34" charset="-122"/>
-                <a:cs typeface="Noto Sans SC" pitchFamily="34" charset="-120"/>
-              </a:rPr>
-              <a:t> </a:t>
-            </a:r>
-            <a:pPr algn="l" indent="0" marL="0">
-              <a:lnSpc>
-                <a:spcPts val="1600"/>
-              </a:lnSpc>
-              <a:buNone/>
-            </a:pPr>
             <a:r>
               <a:rPr lang="en-US" sz="850" dirty="0">
                 <a:solidFill>
@@ -8388,12 +8130,6 @@
               </a:rPr>
               <a:t>"Last unit we talked about </a:t>
             </a:r>
-            <a:pPr algn="l" indent="0" marL="0">
-              <a:lnSpc>
-                <a:spcPts val="1400"/>
-              </a:lnSpc>
-              <a:buNone/>
-            </a:pPr>
             <a:r>
               <a:rPr lang="en-US" sz="1000" b="1" dirty="0">
                 <a:solidFill>
@@ -8405,12 +8141,6 @@
               </a:rPr>
               <a:t>music hobbies</a:t>
             </a:r>
-            <a:pPr algn="l" indent="0" marL="0">
-              <a:lnSpc>
-                <a:spcPts val="1400"/>
-              </a:lnSpc>
-              <a:buNone/>
-            </a:pPr>
             <a:r>
               <a:rPr lang="en-US" sz="1000" dirty="0">
                 <a:solidFill>
@@ -8422,12 +8152,6 @@
               </a:rPr>
               <a:t> with 一边……一边…… — today we start a new hobby topic: </a:t>
             </a:r>
-            <a:pPr algn="l" indent="0" marL="0">
-              <a:lnSpc>
-                <a:spcPts val="1400"/>
-              </a:lnSpc>
-              <a:buNone/>
-            </a:pPr>
             <a:r>
               <a:rPr lang="en-US" sz="1000" b="1" dirty="0">
                 <a:solidFill>
@@ -8439,12 +8163,6 @@
               </a:rPr>
               <a:t>运动 (sports)</a:t>
             </a:r>
-            <a:pPr algn="l" indent="0" marL="0">
-              <a:lnSpc>
-                <a:spcPts val="1400"/>
-              </a:lnSpc>
-              <a:buNone/>
-            </a:pPr>
             <a:r>
               <a:rPr lang="en-US" sz="1000" dirty="0">
                 <a:solidFill>
@@ -8456,12 +8174,6 @@
               </a:rPr>
               <a:t> — and you'll meet a new way to say who you do something </a:t>
             </a:r>
-            <a:pPr algn="l" indent="0" marL="0">
-              <a:lnSpc>
-                <a:spcPts val="1400"/>
-              </a:lnSpc>
-              <a:buNone/>
-            </a:pPr>
             <a:r>
               <a:rPr lang="en-US" sz="1000" b="1" dirty="0">
                 <a:solidFill>
@@ -8473,12 +8185,6 @@
               </a:rPr>
               <a:t>with</a:t>
             </a:r>
-            <a:pPr algn="l" indent="0" marL="0">
-              <a:lnSpc>
-                <a:spcPts val="1400"/>
-              </a:lnSpc>
-              <a:buNone/>
-            </a:pPr>
             <a:r>
               <a:rPr lang="en-US" sz="1000" dirty="0">
                 <a:solidFill>
@@ -8878,9 +8584,6 @@
               </a:rPr>
               <a:t>We are learning to </a:t>
             </a:r>
-            <a:pPr algn="l" indent="0" marL="0">
-              <a:buNone/>
-            </a:pPr>
             <a:r>
               <a:rPr lang="en-US" sz="1300" b="1" dirty="0">
                 <a:solidFill>
@@ -8892,9 +8595,6 @@
               </a:rPr>
               <a:t>name sports in Chinese</a:t>
             </a:r>
-            <a:pPr algn="l" indent="0" marL="0">
-              <a:buNone/>
-            </a:pPr>
             <a:r>
               <a:rPr lang="en-US" sz="1300" dirty="0">
                 <a:solidFill>
@@ -9021,12 +8721,6 @@
               </a:rPr>
               <a:t>I can say </a:t>
             </a:r>
-            <a:pPr algn="l" indent="0" marL="0">
-              <a:lnSpc>
-                <a:spcPts val="1610"/>
-              </a:lnSpc>
-              <a:buNone/>
-            </a:pPr>
             <a:r>
               <a:rPr lang="en-US" sz="1150" dirty="0">
                 <a:solidFill>
@@ -9038,12 +8732,6 @@
               </a:rPr>
               <a:t>运动, 跑步, 游泳, 网球, 打网球</a:t>
             </a:r>
-            <a:pPr algn="l" indent="0" marL="0">
-              <a:lnSpc>
-                <a:spcPts val="1610"/>
-              </a:lnSpc>
-              <a:buNone/>
-            </a:pPr>
             <a:r>
               <a:rPr lang="en-US" sz="1150" dirty="0">
                 <a:solidFill>
@@ -9055,12 +8743,6 @@
               </a:rPr>
               <a:t> in Chinese </a:t>
             </a:r>
-            <a:pPr algn="l" indent="0" marL="0">
-              <a:lnSpc>
-                <a:spcPts val="1610"/>
-              </a:lnSpc>
-              <a:buNone/>
-            </a:pPr>
             <a:r>
               <a:rPr lang="en-US" sz="1150" i="1" dirty="0">
                 <a:solidFill>
@@ -9187,12 +8869,6 @@
               </a:rPr>
               <a:t>I can use </a:t>
             </a:r>
-            <a:pPr algn="l" indent="0" marL="0">
-              <a:lnSpc>
-                <a:spcPts val="1610"/>
-              </a:lnSpc>
-              <a:buNone/>
-            </a:pPr>
             <a:r>
               <a:rPr lang="en-US" sz="1150" dirty="0">
                 <a:solidFill>
@@ -9204,12 +8880,6 @@
               </a:rPr>
               <a:t>跟……一起</a:t>
             </a:r>
-            <a:pPr algn="l" indent="0" marL="0">
-              <a:lnSpc>
-                <a:spcPts val="1610"/>
-              </a:lnSpc>
-              <a:buNone/>
-            </a:pPr>
             <a:r>
               <a:rPr lang="en-US" sz="1150" dirty="0">
                 <a:solidFill>
@@ -9221,12 +8891,6 @@
               </a:rPr>
               <a:t> to say </a:t>
             </a:r>
-            <a:pPr algn="l" indent="0" marL="0">
-              <a:lnSpc>
-                <a:spcPts val="1610"/>
-              </a:lnSpc>
-              <a:buNone/>
-            </a:pPr>
             <a:r>
               <a:rPr lang="en-US" sz="1150" b="1" dirty="0">
                 <a:solidFill>
@@ -9238,12 +8902,6 @@
               </a:rPr>
               <a:t>who I do something with</a:t>
             </a:r>
-            <a:pPr algn="l" indent="0" marL="0">
-              <a:lnSpc>
-                <a:spcPts val="1610"/>
-              </a:lnSpc>
-              <a:buNone/>
-            </a:pPr>
             <a:r>
               <a:rPr lang="en-US" sz="1150" dirty="0">
                 <a:solidFill>
@@ -9255,12 +8913,6 @@
               </a:rPr>
               <a:t> — </a:t>
             </a:r>
-            <a:pPr algn="l" indent="0" marL="0">
-              <a:lnSpc>
-                <a:spcPts val="1610"/>
-              </a:lnSpc>
-              <a:buNone/>
-            </a:pPr>
             <a:r>
               <a:rPr lang="en-US" sz="1150" dirty="0">
                 <a:solidFill>
@@ -9387,12 +9039,6 @@
               </a:rPr>
               <a:t>I can pick the right </a:t>
             </a:r>
-            <a:pPr algn="l" indent="0" marL="0">
-              <a:lnSpc>
-                <a:spcPts val="1610"/>
-              </a:lnSpc>
-              <a:buNone/>
-            </a:pPr>
             <a:r>
               <a:rPr lang="en-US" sz="1150" b="1" dirty="0">
                 <a:solidFill>
@@ -9404,12 +9050,6 @@
               </a:rPr>
               <a:t>verb pattern</a:t>
             </a:r>
-            <a:pPr algn="l" indent="0" marL="0">
-              <a:lnSpc>
-                <a:spcPts val="1610"/>
-              </a:lnSpc>
-              <a:buNone/>
-            </a:pPr>
             <a:r>
               <a:rPr lang="en-US" sz="1150" dirty="0">
                 <a:solidFill>
@@ -9421,12 +9061,6 @@
               </a:rPr>
               <a:t>: </a:t>
             </a:r>
-            <a:pPr algn="l" indent="0" marL="0">
-              <a:lnSpc>
-                <a:spcPts val="1610"/>
-              </a:lnSpc>
-              <a:buNone/>
-            </a:pPr>
             <a:r>
               <a:rPr lang="en-US" sz="1150" dirty="0">
                 <a:solidFill>
@@ -9438,12 +9072,6 @@
               </a:rPr>
               <a:t>打</a:t>
             </a:r>
-            <a:pPr algn="l" indent="0" marL="0">
-              <a:lnSpc>
-                <a:spcPts val="1610"/>
-              </a:lnSpc>
-              <a:buNone/>
-            </a:pPr>
             <a:r>
               <a:rPr lang="en-US" sz="1150" dirty="0">
                 <a:solidFill>
@@ -9455,12 +9083,6 @@
               </a:rPr>
               <a:t> for racket sports, no verb for </a:t>
             </a:r>
-            <a:pPr algn="l" indent="0" marL="0">
-              <a:lnSpc>
-                <a:spcPts val="1610"/>
-              </a:lnSpc>
-              <a:buNone/>
-            </a:pPr>
             <a:r>
               <a:rPr lang="en-US" sz="1150" dirty="0">
                 <a:solidFill>
@@ -9800,6 +9422,53 @@
               </a:rPr>
               <a:t>运动</a:t>
             </a:r>
+            <a:r>
+              <a:rPr lang="en-US" sz="1100" dirty="0">
+                <a:solidFill>
+                  <a:srgbClr val="1E2A38"/>
+                </a:solidFill>
+                <a:latin typeface="Noto Sans SC" pitchFamily="34" charset="0"/>
+                <a:ea typeface="Noto Sans SC" pitchFamily="34" charset="-122"/>
+                <a:cs typeface="Noto Sans SC" pitchFamily="34" charset="-120"/>
+              </a:rPr>
+              <a:t> </a:t>
+            </a:r>
+            <a:r>
+              <a:rPr lang="en-US" sz="1100" dirty="0">
+                <a:solidFill>
+                  <a:srgbClr val="3A7D8C"/>
+                </a:solidFill>
+                <a:latin typeface="Noto Sans SC" pitchFamily="34" charset="0"/>
+                <a:ea typeface="Noto Sans SC" pitchFamily="34" charset="-122"/>
+                <a:cs typeface="Noto Sans SC" pitchFamily="34" charset="-120"/>
+              </a:rPr>
+              <a:t>yùndòng</a:t>
+            </a:r>
+            <a:r>
+              <a:rPr lang="en-US" sz="1100" dirty="0">
+                <a:solidFill>
+                  <a:srgbClr val="1E2A38"/>
+                </a:solidFill>
+                <a:latin typeface="Noto Sans SC" pitchFamily="34" charset="0"/>
+                <a:ea typeface="Noto Sans SC" pitchFamily="34" charset="-122"/>
+                <a:cs typeface="Noto Sans SC" pitchFamily="34" charset="-120"/>
+              </a:rPr>
+              <a:t> </a:t>
+            </a:r>
+            <a:r>
+              <a:rPr lang="en-US" sz="1100" dirty="0">
+                <a:solidFill>
+                  <a:srgbClr val="8B94A3"/>
+                </a:solidFill>
+                <a:latin typeface="Noto Sans SC" pitchFamily="34" charset="0"/>
+                <a:ea typeface="Noto Sans SC" pitchFamily="34" charset="-122"/>
+                <a:cs typeface="Noto Sans SC" pitchFamily="34" charset="-120"/>
+              </a:rPr>
+              <a:t>— sports; exercise</a:t>
+            </a:r>
+            <a:endParaRPr lang="en-US" sz="1100" dirty="0"/>
+          </a:p>
+          <a:p>
             <a:pPr algn="l" indent="0" marL="0">
               <a:lnSpc>
                 <a:spcPts val="1705"/>
@@ -9807,6 +9476,17 @@
               <a:buNone/>
             </a:pPr>
             <a:r>
+              <a:rPr lang="en-US" sz="1300" b="1" dirty="0">
+                <a:solidFill>
+                  <a:srgbClr val="1E2A38"/>
+                </a:solidFill>
+                <a:latin typeface="Noto Sans SC" pitchFamily="34" charset="0"/>
+                <a:ea typeface="Noto Sans SC" pitchFamily="34" charset="-122"/>
+                <a:cs typeface="Noto Sans SC" pitchFamily="34" charset="-120"/>
+              </a:rPr>
+              <a:t>跑步</a:t>
+            </a:r>
+            <a:r>
               <a:rPr lang="en-US" sz="1100" dirty="0">
                 <a:solidFill>
                   <a:srgbClr val="1E2A38"/>
@@ -9817,6 +9497,42 @@
               </a:rPr>
               <a:t> </a:t>
             </a:r>
+            <a:r>
+              <a:rPr lang="en-US" sz="1100" dirty="0">
+                <a:solidFill>
+                  <a:srgbClr val="3A7D8C"/>
+                </a:solidFill>
+                <a:latin typeface="Noto Sans SC" pitchFamily="34" charset="0"/>
+                <a:ea typeface="Noto Sans SC" pitchFamily="34" charset="-122"/>
+                <a:cs typeface="Noto Sans SC" pitchFamily="34" charset="-120"/>
+              </a:rPr>
+              <a:t>pǎobù</a:t>
+            </a:r>
+            <a:r>
+              <a:rPr lang="en-US" sz="1100" dirty="0">
+                <a:solidFill>
+                  <a:srgbClr val="1E2A38"/>
+                </a:solidFill>
+                <a:latin typeface="Noto Sans SC" pitchFamily="34" charset="0"/>
+                <a:ea typeface="Noto Sans SC" pitchFamily="34" charset="-122"/>
+                <a:cs typeface="Noto Sans SC" pitchFamily="34" charset="-120"/>
+              </a:rPr>
+              <a:t> </a:t>
+            </a:r>
+            <a:r>
+              <a:rPr lang="en-US" sz="1100" dirty="0">
+                <a:solidFill>
+                  <a:srgbClr val="8B94A3"/>
+                </a:solidFill>
+                <a:latin typeface="Noto Sans SC" pitchFamily="34" charset="0"/>
+                <a:ea typeface="Noto Sans SC" pitchFamily="34" charset="-122"/>
+                <a:cs typeface="Noto Sans SC" pitchFamily="34" charset="-120"/>
+              </a:rPr>
+              <a:t>— run; jog</a:t>
+            </a:r>
+            <a:endParaRPr lang="en-US" sz="1100" dirty="0"/>
+          </a:p>
+          <a:p>
             <a:pPr algn="l" indent="0" marL="0">
               <a:lnSpc>
                 <a:spcPts val="1705"/>
@@ -9824,16 +9540,63 @@
               <a:buNone/>
             </a:pPr>
             <a:r>
+              <a:rPr lang="en-US" sz="1300" b="1" dirty="0">
+                <a:solidFill>
+                  <a:srgbClr val="1E2A38"/>
+                </a:solidFill>
+                <a:latin typeface="Noto Sans SC" pitchFamily="34" charset="0"/>
+                <a:ea typeface="Noto Sans SC" pitchFamily="34" charset="-122"/>
+                <a:cs typeface="Noto Sans SC" pitchFamily="34" charset="-120"/>
+              </a:rPr>
+              <a:t>游泳</a:t>
+            </a:r>
+            <a:r>
               <a:rPr lang="en-US" sz="1100" dirty="0">
                 <a:solidFill>
+                  <a:srgbClr val="1E2A38"/>
+                </a:solidFill>
+                <a:latin typeface="Noto Sans SC" pitchFamily="34" charset="0"/>
+                <a:ea typeface="Noto Sans SC" pitchFamily="34" charset="-122"/>
+                <a:cs typeface="Noto Sans SC" pitchFamily="34" charset="-120"/>
+              </a:rPr>
+              <a:t> </a:t>
+            </a:r>
+            <a:r>
+              <a:rPr lang="en-US" sz="1100" dirty="0">
+                <a:solidFill>
                   <a:srgbClr val="3A7D8C"/>
                 </a:solidFill>
                 <a:latin typeface="Noto Sans SC" pitchFamily="34" charset="0"/>
                 <a:ea typeface="Noto Sans SC" pitchFamily="34" charset="-122"/>
                 <a:cs typeface="Noto Sans SC" pitchFamily="34" charset="-120"/>
               </a:rPr>
-              <a:t>yùndòng</a:t>
-            </a:r>
+              <a:t>yóuyǒng</a:t>
+            </a:r>
+            <a:r>
+              <a:rPr lang="en-US" sz="1100" dirty="0">
+                <a:solidFill>
+                  <a:srgbClr val="1E2A38"/>
+                </a:solidFill>
+                <a:latin typeface="Noto Sans SC" pitchFamily="34" charset="0"/>
+                <a:ea typeface="Noto Sans SC" pitchFamily="34" charset="-122"/>
+                <a:cs typeface="Noto Sans SC" pitchFamily="34" charset="-120"/>
+              </a:rPr>
+              <a:t> </a:t>
+            </a:r>
+            <a:r>
+              <a:rPr lang="en-US" sz="1100" dirty="0">
+                <a:solidFill>
+                  <a:srgbClr val="8B94A3"/>
+                </a:solidFill>
+                <a:latin typeface="Noto Sans SC" pitchFamily="34" charset="0"/>
+                <a:ea typeface="Noto Sans SC" pitchFamily="34" charset="-122"/>
+                <a:cs typeface="Noto Sans SC" pitchFamily="34" charset="-120"/>
+              </a:rPr>
+              <a:t>— swim</a:t>
+            </a:r>
+            <a:endParaRPr lang="en-US" sz="1100" dirty="0"/>
+          </a:p>
+          <a:p>
             <a:pPr algn="l" indent="0" marL="0">
               <a:lnSpc>
                 <a:spcPts val="1705"/>
@@ -9841,6 +9604,17 @@
               <a:buNone/>
             </a:pPr>
             <a:r>
+              <a:rPr lang="en-US" sz="1300" b="1" dirty="0">
+                <a:solidFill>
+                  <a:srgbClr val="1E2A38"/>
+                </a:solidFill>
+                <a:latin typeface="Noto Sans SC" pitchFamily="34" charset="0"/>
+                <a:ea typeface="Noto Sans SC" pitchFamily="34" charset="-122"/>
+                <a:cs typeface="Noto Sans SC" pitchFamily="34" charset="-120"/>
+              </a:rPr>
+              <a:t>一起</a:t>
+            </a:r>
+            <a:r>
               <a:rPr lang="en-US" sz="1100" dirty="0">
                 <a:solidFill>
                   <a:srgbClr val="1E2A38"/>
@@ -9851,6 +9625,42 @@
               </a:rPr>
               <a:t> </a:t>
             </a:r>
+            <a:r>
+              <a:rPr lang="en-US" sz="1100" dirty="0">
+                <a:solidFill>
+                  <a:srgbClr val="3A7D8C"/>
+                </a:solidFill>
+                <a:latin typeface="Noto Sans SC" pitchFamily="34" charset="0"/>
+                <a:ea typeface="Noto Sans SC" pitchFamily="34" charset="-122"/>
+                <a:cs typeface="Noto Sans SC" pitchFamily="34" charset="-120"/>
+              </a:rPr>
+              <a:t>yìqǐ</a:t>
+            </a:r>
+            <a:r>
+              <a:rPr lang="en-US" sz="1100" dirty="0">
+                <a:solidFill>
+                  <a:srgbClr val="1E2A38"/>
+                </a:solidFill>
+                <a:latin typeface="Noto Sans SC" pitchFamily="34" charset="0"/>
+                <a:ea typeface="Noto Sans SC" pitchFamily="34" charset="-122"/>
+                <a:cs typeface="Noto Sans SC" pitchFamily="34" charset="-120"/>
+              </a:rPr>
+              <a:t> </a:t>
+            </a:r>
+            <a:r>
+              <a:rPr lang="en-US" sz="1100" dirty="0">
+                <a:solidFill>
+                  <a:srgbClr val="8B94A3"/>
+                </a:solidFill>
+                <a:latin typeface="Noto Sans SC" pitchFamily="34" charset="0"/>
+                <a:ea typeface="Noto Sans SC" pitchFamily="34" charset="-122"/>
+                <a:cs typeface="Noto Sans SC" pitchFamily="34" charset="-120"/>
+              </a:rPr>
+              <a:t>— together</a:t>
+            </a:r>
+            <a:endParaRPr lang="en-US" sz="1100" dirty="0"/>
+          </a:p>
+          <a:p>
             <a:pPr algn="l" indent="0" marL="0">
               <a:lnSpc>
                 <a:spcPts val="1705"/>
@@ -9858,15 +9668,59 @@
               <a:buNone/>
             </a:pPr>
             <a:r>
+              <a:rPr lang="en-US" sz="1300" b="1" dirty="0">
+                <a:solidFill>
+                  <a:srgbClr val="C8943E"/>
+                </a:solidFill>
+                <a:latin typeface="Noto Sans SC" pitchFamily="34" charset="0"/>
+                <a:ea typeface="Noto Sans SC" pitchFamily="34" charset="-122"/>
+                <a:cs typeface="Noto Sans SC" pitchFamily="34" charset="-120"/>
+              </a:rPr>
+              <a:t>跟……一起</a:t>
+            </a:r>
+            <a:r>
               <a:rPr lang="en-US" sz="1100" dirty="0">
                 <a:solidFill>
+                  <a:srgbClr val="1E2A38"/>
+                </a:solidFill>
+                <a:latin typeface="Noto Sans SC" pitchFamily="34" charset="0"/>
+                <a:ea typeface="Noto Sans SC" pitchFamily="34" charset="-122"/>
+                <a:cs typeface="Noto Sans SC" pitchFamily="34" charset="-120"/>
+              </a:rPr>
+              <a:t> </a:t>
+            </a:r>
+            <a:r>
+              <a:rPr lang="en-US" sz="1100" dirty="0">
+                <a:solidFill>
+                  <a:srgbClr val="3A7D8C"/>
+                </a:solidFill>
+                <a:latin typeface="Noto Sans SC" pitchFamily="34" charset="0"/>
+                <a:ea typeface="Noto Sans SC" pitchFamily="34" charset="-122"/>
+                <a:cs typeface="Noto Sans SC" pitchFamily="34" charset="-120"/>
+              </a:rPr>
+              <a:t>gēn…yìqǐ</a:t>
+            </a:r>
+            <a:r>
+              <a:rPr lang="en-US" sz="1100" dirty="0">
+                <a:solidFill>
+                  <a:srgbClr val="1E2A38"/>
+                </a:solidFill>
+                <a:latin typeface="Noto Sans SC" pitchFamily="34" charset="0"/>
+                <a:ea typeface="Noto Sans SC" pitchFamily="34" charset="-122"/>
+                <a:cs typeface="Noto Sans SC" pitchFamily="34" charset="-120"/>
+              </a:rPr>
+              <a:t> </a:t>
+            </a:r>
+            <a:r>
+              <a:rPr lang="en-US" sz="1100" dirty="0">
+                <a:solidFill>
                   <a:srgbClr val="8B94A3"/>
                 </a:solidFill>
                 <a:latin typeface="Noto Sans SC" pitchFamily="34" charset="0"/>
                 <a:ea typeface="Noto Sans SC" pitchFamily="34" charset="-122"/>
                 <a:cs typeface="Noto Sans SC" pitchFamily="34" charset="-120"/>
               </a:rPr>
-              <a:t>— sports; exercise</a:t>
+              <a:t>— together with</a:t>
             </a:r>
             <a:endParaRPr lang="en-US" sz="1100" dirty="0"/>
           </a:p>
@@ -9886,8 +9740,55 @@
                 <a:ea typeface="Noto Sans SC" pitchFamily="34" charset="-122"/>
                 <a:cs typeface="Noto Sans SC" pitchFamily="34" charset="-120"/>
               </a:rPr>
-              <a:t>跑步</a:t>
-            </a:r>
+              <a:t>网球</a:t>
+            </a:r>
+            <a:r>
+              <a:rPr lang="en-US" sz="1100" dirty="0">
+                <a:solidFill>
+                  <a:srgbClr val="1E2A38"/>
+                </a:solidFill>
+                <a:latin typeface="Noto Sans SC" pitchFamily="34" charset="0"/>
+                <a:ea typeface="Noto Sans SC" pitchFamily="34" charset="-122"/>
+                <a:cs typeface="Noto Sans SC" pitchFamily="34" charset="-120"/>
+              </a:rPr>
+              <a:t> </a:t>
+            </a:r>
+            <a:r>
+              <a:rPr lang="en-US" sz="1100" dirty="0">
+                <a:solidFill>
+                  <a:srgbClr val="3A7D8C"/>
+                </a:solidFill>
+                <a:latin typeface="Noto Sans SC" pitchFamily="34" charset="0"/>
+                <a:ea typeface="Noto Sans SC" pitchFamily="34" charset="-122"/>
+                <a:cs typeface="Noto Sans SC" pitchFamily="34" charset="-120"/>
+              </a:rPr>
+              <a:t>wǎngqiú</a:t>
+            </a:r>
+            <a:r>
+              <a:rPr lang="en-US" sz="1100" dirty="0">
+                <a:solidFill>
+                  <a:srgbClr val="1E2A38"/>
+                </a:solidFill>
+                <a:latin typeface="Noto Sans SC" pitchFamily="34" charset="0"/>
+                <a:ea typeface="Noto Sans SC" pitchFamily="34" charset="-122"/>
+                <a:cs typeface="Noto Sans SC" pitchFamily="34" charset="-120"/>
+              </a:rPr>
+              <a:t> </a:t>
+            </a:r>
+            <a:r>
+              <a:rPr lang="en-US" sz="1100" dirty="0">
+                <a:solidFill>
+                  <a:srgbClr val="8B94A3"/>
+                </a:solidFill>
+                <a:latin typeface="Noto Sans SC" pitchFamily="34" charset="0"/>
+                <a:ea typeface="Noto Sans SC" pitchFamily="34" charset="-122"/>
+                <a:cs typeface="Noto Sans SC" pitchFamily="34" charset="-120"/>
+              </a:rPr>
+              <a:t>— tennis</a:t>
+            </a:r>
+            <a:endParaRPr lang="en-US" sz="1100" dirty="0"/>
+          </a:p>
+          <a:p>
             <a:pPr algn="l" indent="0" marL="0">
               <a:lnSpc>
                 <a:spcPts val="1705"/>
@@ -9895,6 +9796,17 @@
               <a:buNone/>
             </a:pPr>
             <a:r>
+              <a:rPr lang="en-US" sz="1300" b="1" dirty="0">
+                <a:solidFill>
+                  <a:srgbClr val="C8943E"/>
+                </a:solidFill>
+                <a:latin typeface="Noto Sans SC" pitchFamily="34" charset="0"/>
+                <a:ea typeface="Noto Sans SC" pitchFamily="34" charset="-122"/>
+                <a:cs typeface="Noto Sans SC" pitchFamily="34" charset="-120"/>
+              </a:rPr>
+              <a:t>打网球</a:t>
+            </a:r>
+            <a:r>
               <a:rPr lang="en-US" sz="1100" dirty="0">
                 <a:solidFill>
                   <a:srgbClr val="1E2A38"/>
@@ -9905,12 +9817,6 @@
               </a:rPr>
               <a:t> </a:t>
             </a:r>
-            <a:pPr algn="l" indent="0" marL="0">
-              <a:lnSpc>
-                <a:spcPts val="1705"/>
-              </a:lnSpc>
-              <a:buNone/>
-            </a:pPr>
             <a:r>
               <a:rPr lang="en-US" sz="1100" dirty="0">
                 <a:solidFill>
@@ -9920,14 +9826,8 @@
                 <a:ea typeface="Noto Sans SC" pitchFamily="34" charset="-122"/>
                 <a:cs typeface="Noto Sans SC" pitchFamily="34" charset="-120"/>
               </a:rPr>
-              <a:t>pǎobù</a:t>
-            </a:r>
-            <a:pPr algn="l" indent="0" marL="0">
-              <a:lnSpc>
-                <a:spcPts val="1705"/>
-              </a:lnSpc>
-              <a:buNone/>
-            </a:pPr>
+              <a:t>dǎ wǎngqiú</a:t>
+            </a:r>
             <a:r>
               <a:rPr lang="en-US" sz="1100" dirty="0">
                 <a:solidFill>
@@ -9939,452 +9839,6 @@
               </a:rPr>
               <a:t> </a:t>
             </a:r>
-            <a:pPr algn="l" indent="0" marL="0">
-              <a:lnSpc>
-                <a:spcPts val="1705"/>
-              </a:lnSpc>
-              <a:buNone/>
-            </a:pPr>
-            <a:r>
-              <a:rPr lang="en-US" sz="1100" dirty="0">
-                <a:solidFill>
-                  <a:srgbClr val="8B94A3"/>
-                </a:solidFill>
-                <a:latin typeface="Noto Sans SC" pitchFamily="34" charset="0"/>
-                <a:ea typeface="Noto Sans SC" pitchFamily="34" charset="-122"/>
-                <a:cs typeface="Noto Sans SC" pitchFamily="34" charset="-120"/>
-              </a:rPr>
-              <a:t>— run; jog</a:t>
-            </a:r>
-            <a:endParaRPr lang="en-US" sz="1100" dirty="0"/>
-          </a:p>
-          <a:p>
-            <a:pPr algn="l" indent="0" marL="0">
-              <a:lnSpc>
-                <a:spcPts val="1705"/>
-              </a:lnSpc>
-              <a:buNone/>
-            </a:pPr>
-            <a:r>
-              <a:rPr lang="en-US" sz="1300" b="1" dirty="0">
-                <a:solidFill>
-                  <a:srgbClr val="1E2A38"/>
-                </a:solidFill>
-                <a:latin typeface="Noto Sans SC" pitchFamily="34" charset="0"/>
-                <a:ea typeface="Noto Sans SC" pitchFamily="34" charset="-122"/>
-                <a:cs typeface="Noto Sans SC" pitchFamily="34" charset="-120"/>
-              </a:rPr>
-              <a:t>游泳</a:t>
-            </a:r>
-            <a:pPr algn="l" indent="0" marL="0">
-              <a:lnSpc>
-                <a:spcPts val="1705"/>
-              </a:lnSpc>
-              <a:buNone/>
-            </a:pPr>
-            <a:r>
-              <a:rPr lang="en-US" sz="1100" dirty="0">
-                <a:solidFill>
-                  <a:srgbClr val="1E2A38"/>
-                </a:solidFill>
-                <a:latin typeface="Noto Sans SC" pitchFamily="34" charset="0"/>
-                <a:ea typeface="Noto Sans SC" pitchFamily="34" charset="-122"/>
-                <a:cs typeface="Noto Sans SC" pitchFamily="34" charset="-120"/>
-              </a:rPr>
-              <a:t> </a:t>
-            </a:r>
-            <a:pPr algn="l" indent="0" marL="0">
-              <a:lnSpc>
-                <a:spcPts val="1705"/>
-              </a:lnSpc>
-              <a:buNone/>
-            </a:pPr>
-            <a:r>
-              <a:rPr lang="en-US" sz="1100" dirty="0">
-                <a:solidFill>
-                  <a:srgbClr val="3A7D8C"/>
-                </a:solidFill>
-                <a:latin typeface="Noto Sans SC" pitchFamily="34" charset="0"/>
-                <a:ea typeface="Noto Sans SC" pitchFamily="34" charset="-122"/>
-                <a:cs typeface="Noto Sans SC" pitchFamily="34" charset="-120"/>
-              </a:rPr>
-              <a:t>yóuyǒng</a:t>
-            </a:r>
-            <a:pPr algn="l" indent="0" marL="0">
-              <a:lnSpc>
-                <a:spcPts val="1705"/>
-              </a:lnSpc>
-              <a:buNone/>
-            </a:pPr>
-            <a:r>
-              <a:rPr lang="en-US" sz="1100" dirty="0">
-                <a:solidFill>
-                  <a:srgbClr val="1E2A38"/>
-                </a:solidFill>
-                <a:latin typeface="Noto Sans SC" pitchFamily="34" charset="0"/>
-                <a:ea typeface="Noto Sans SC" pitchFamily="34" charset="-122"/>
-                <a:cs typeface="Noto Sans SC" pitchFamily="34" charset="-120"/>
-              </a:rPr>
-              <a:t> </a:t>
-            </a:r>
-            <a:pPr algn="l" indent="0" marL="0">
-              <a:lnSpc>
-                <a:spcPts val="1705"/>
-              </a:lnSpc>
-              <a:buNone/>
-            </a:pPr>
-            <a:r>
-              <a:rPr lang="en-US" sz="1100" dirty="0">
-                <a:solidFill>
-                  <a:srgbClr val="8B94A3"/>
-                </a:solidFill>
-                <a:latin typeface="Noto Sans SC" pitchFamily="34" charset="0"/>
-                <a:ea typeface="Noto Sans SC" pitchFamily="34" charset="-122"/>
-                <a:cs typeface="Noto Sans SC" pitchFamily="34" charset="-120"/>
-              </a:rPr>
-              <a:t>— swim</a:t>
-            </a:r>
-            <a:endParaRPr lang="en-US" sz="1100" dirty="0"/>
-          </a:p>
-          <a:p>
-            <a:pPr algn="l" indent="0" marL="0">
-              <a:lnSpc>
-                <a:spcPts val="1705"/>
-              </a:lnSpc>
-              <a:buNone/>
-            </a:pPr>
-            <a:r>
-              <a:rPr lang="en-US" sz="1300" b="1" dirty="0">
-                <a:solidFill>
-                  <a:srgbClr val="1E2A38"/>
-                </a:solidFill>
-                <a:latin typeface="Noto Sans SC" pitchFamily="34" charset="0"/>
-                <a:ea typeface="Noto Sans SC" pitchFamily="34" charset="-122"/>
-                <a:cs typeface="Noto Sans SC" pitchFamily="34" charset="-120"/>
-              </a:rPr>
-              <a:t>一起</a:t>
-            </a:r>
-            <a:pPr algn="l" indent="0" marL="0">
-              <a:lnSpc>
-                <a:spcPts val="1705"/>
-              </a:lnSpc>
-              <a:buNone/>
-            </a:pPr>
-            <a:r>
-              <a:rPr lang="en-US" sz="1100" dirty="0">
-                <a:solidFill>
-                  <a:srgbClr val="1E2A38"/>
-                </a:solidFill>
-                <a:latin typeface="Noto Sans SC" pitchFamily="34" charset="0"/>
-                <a:ea typeface="Noto Sans SC" pitchFamily="34" charset="-122"/>
-                <a:cs typeface="Noto Sans SC" pitchFamily="34" charset="-120"/>
-              </a:rPr>
-              <a:t> </a:t>
-            </a:r>
-            <a:pPr algn="l" indent="0" marL="0">
-              <a:lnSpc>
-                <a:spcPts val="1705"/>
-              </a:lnSpc>
-              <a:buNone/>
-            </a:pPr>
-            <a:r>
-              <a:rPr lang="en-US" sz="1100" dirty="0">
-                <a:solidFill>
-                  <a:srgbClr val="3A7D8C"/>
-                </a:solidFill>
-                <a:latin typeface="Noto Sans SC" pitchFamily="34" charset="0"/>
-                <a:ea typeface="Noto Sans SC" pitchFamily="34" charset="-122"/>
-                <a:cs typeface="Noto Sans SC" pitchFamily="34" charset="-120"/>
-              </a:rPr>
-              <a:t>yìqǐ</a:t>
-            </a:r>
-            <a:pPr algn="l" indent="0" marL="0">
-              <a:lnSpc>
-                <a:spcPts val="1705"/>
-              </a:lnSpc>
-              <a:buNone/>
-            </a:pPr>
-            <a:r>
-              <a:rPr lang="en-US" sz="1100" dirty="0">
-                <a:solidFill>
-                  <a:srgbClr val="1E2A38"/>
-                </a:solidFill>
-                <a:latin typeface="Noto Sans SC" pitchFamily="34" charset="0"/>
-                <a:ea typeface="Noto Sans SC" pitchFamily="34" charset="-122"/>
-                <a:cs typeface="Noto Sans SC" pitchFamily="34" charset="-120"/>
-              </a:rPr>
-              <a:t> </a:t>
-            </a:r>
-            <a:pPr algn="l" indent="0" marL="0">
-              <a:lnSpc>
-                <a:spcPts val="1705"/>
-              </a:lnSpc>
-              <a:buNone/>
-            </a:pPr>
-            <a:r>
-              <a:rPr lang="en-US" sz="1100" dirty="0">
-                <a:solidFill>
-                  <a:srgbClr val="8B94A3"/>
-                </a:solidFill>
-                <a:latin typeface="Noto Sans SC" pitchFamily="34" charset="0"/>
-                <a:ea typeface="Noto Sans SC" pitchFamily="34" charset="-122"/>
-                <a:cs typeface="Noto Sans SC" pitchFamily="34" charset="-120"/>
-              </a:rPr>
-              <a:t>— together</a:t>
-            </a:r>
-            <a:endParaRPr lang="en-US" sz="1100" dirty="0"/>
-          </a:p>
-          <a:p>
-            <a:pPr algn="l" indent="0" marL="0">
-              <a:lnSpc>
-                <a:spcPts val="1705"/>
-              </a:lnSpc>
-              <a:buNone/>
-            </a:pPr>
-            <a:r>
-              <a:rPr lang="en-US" sz="1300" b="1" dirty="0">
-                <a:solidFill>
-                  <a:srgbClr val="C8943E"/>
-                </a:solidFill>
-                <a:latin typeface="Noto Sans SC" pitchFamily="34" charset="0"/>
-                <a:ea typeface="Noto Sans SC" pitchFamily="34" charset="-122"/>
-                <a:cs typeface="Noto Sans SC" pitchFamily="34" charset="-120"/>
-              </a:rPr>
-              <a:t>跟……一起</a:t>
-            </a:r>
-            <a:pPr algn="l" indent="0" marL="0">
-              <a:lnSpc>
-                <a:spcPts val="1705"/>
-              </a:lnSpc>
-              <a:buNone/>
-            </a:pPr>
-            <a:r>
-              <a:rPr lang="en-US" sz="1100" dirty="0">
-                <a:solidFill>
-                  <a:srgbClr val="1E2A38"/>
-                </a:solidFill>
-                <a:latin typeface="Noto Sans SC" pitchFamily="34" charset="0"/>
-                <a:ea typeface="Noto Sans SC" pitchFamily="34" charset="-122"/>
-                <a:cs typeface="Noto Sans SC" pitchFamily="34" charset="-120"/>
-              </a:rPr>
-              <a:t> </a:t>
-            </a:r>
-            <a:pPr algn="l" indent="0" marL="0">
-              <a:lnSpc>
-                <a:spcPts val="1705"/>
-              </a:lnSpc>
-              <a:buNone/>
-            </a:pPr>
-            <a:r>
-              <a:rPr lang="en-US" sz="1100" dirty="0">
-                <a:solidFill>
-                  <a:srgbClr val="3A7D8C"/>
-                </a:solidFill>
-                <a:latin typeface="Noto Sans SC" pitchFamily="34" charset="0"/>
-                <a:ea typeface="Noto Sans SC" pitchFamily="34" charset="-122"/>
-                <a:cs typeface="Noto Sans SC" pitchFamily="34" charset="-120"/>
-              </a:rPr>
-              <a:t>gēn…yìqǐ</a:t>
-            </a:r>
-            <a:pPr algn="l" indent="0" marL="0">
-              <a:lnSpc>
-                <a:spcPts val="1705"/>
-              </a:lnSpc>
-              <a:buNone/>
-            </a:pPr>
-            <a:r>
-              <a:rPr lang="en-US" sz="1100" dirty="0">
-                <a:solidFill>
-                  <a:srgbClr val="1E2A38"/>
-                </a:solidFill>
-                <a:latin typeface="Noto Sans SC" pitchFamily="34" charset="0"/>
-                <a:ea typeface="Noto Sans SC" pitchFamily="34" charset="-122"/>
-                <a:cs typeface="Noto Sans SC" pitchFamily="34" charset="-120"/>
-              </a:rPr>
-              <a:t> </a:t>
-            </a:r>
-            <a:pPr algn="l" indent="0" marL="0">
-              <a:lnSpc>
-                <a:spcPts val="1705"/>
-              </a:lnSpc>
-              <a:buNone/>
-            </a:pPr>
-            <a:r>
-              <a:rPr lang="en-US" sz="1100" dirty="0">
-                <a:solidFill>
-                  <a:srgbClr val="8B94A3"/>
-                </a:solidFill>
-                <a:latin typeface="Noto Sans SC" pitchFamily="34" charset="0"/>
-                <a:ea typeface="Noto Sans SC" pitchFamily="34" charset="-122"/>
-                <a:cs typeface="Noto Sans SC" pitchFamily="34" charset="-120"/>
-              </a:rPr>
-              <a:t>— together with</a:t>
-            </a:r>
-            <a:endParaRPr lang="en-US" sz="1100" dirty="0"/>
-          </a:p>
-          <a:p>
-            <a:pPr algn="l" indent="0" marL="0">
-              <a:lnSpc>
-                <a:spcPts val="1705"/>
-              </a:lnSpc>
-              <a:buNone/>
-            </a:pPr>
-            <a:r>
-              <a:rPr lang="en-US" sz="1300" b="1" dirty="0">
-                <a:solidFill>
-                  <a:srgbClr val="1E2A38"/>
-                </a:solidFill>
-                <a:latin typeface="Noto Sans SC" pitchFamily="34" charset="0"/>
-                <a:ea typeface="Noto Sans SC" pitchFamily="34" charset="-122"/>
-                <a:cs typeface="Noto Sans SC" pitchFamily="34" charset="-120"/>
-              </a:rPr>
-              <a:t>网球</a:t>
-            </a:r>
-            <a:pPr algn="l" indent="0" marL="0">
-              <a:lnSpc>
-                <a:spcPts val="1705"/>
-              </a:lnSpc>
-              <a:buNone/>
-            </a:pPr>
-            <a:r>
-              <a:rPr lang="en-US" sz="1100" dirty="0">
-                <a:solidFill>
-                  <a:srgbClr val="1E2A38"/>
-                </a:solidFill>
-                <a:latin typeface="Noto Sans SC" pitchFamily="34" charset="0"/>
-                <a:ea typeface="Noto Sans SC" pitchFamily="34" charset="-122"/>
-                <a:cs typeface="Noto Sans SC" pitchFamily="34" charset="-120"/>
-              </a:rPr>
-              <a:t> </a:t>
-            </a:r>
-            <a:pPr algn="l" indent="0" marL="0">
-              <a:lnSpc>
-                <a:spcPts val="1705"/>
-              </a:lnSpc>
-              <a:buNone/>
-            </a:pPr>
-            <a:r>
-              <a:rPr lang="en-US" sz="1100" dirty="0">
-                <a:solidFill>
-                  <a:srgbClr val="3A7D8C"/>
-                </a:solidFill>
-                <a:latin typeface="Noto Sans SC" pitchFamily="34" charset="0"/>
-                <a:ea typeface="Noto Sans SC" pitchFamily="34" charset="-122"/>
-                <a:cs typeface="Noto Sans SC" pitchFamily="34" charset="-120"/>
-              </a:rPr>
-              <a:t>wǎngqiú</a:t>
-            </a:r>
-            <a:pPr algn="l" indent="0" marL="0">
-              <a:lnSpc>
-                <a:spcPts val="1705"/>
-              </a:lnSpc>
-              <a:buNone/>
-            </a:pPr>
-            <a:r>
-              <a:rPr lang="en-US" sz="1100" dirty="0">
-                <a:solidFill>
-                  <a:srgbClr val="1E2A38"/>
-                </a:solidFill>
-                <a:latin typeface="Noto Sans SC" pitchFamily="34" charset="0"/>
-                <a:ea typeface="Noto Sans SC" pitchFamily="34" charset="-122"/>
-                <a:cs typeface="Noto Sans SC" pitchFamily="34" charset="-120"/>
-              </a:rPr>
-              <a:t> </a:t>
-            </a:r>
-            <a:pPr algn="l" indent="0" marL="0">
-              <a:lnSpc>
-                <a:spcPts val="1705"/>
-              </a:lnSpc>
-              <a:buNone/>
-            </a:pPr>
-            <a:r>
-              <a:rPr lang="en-US" sz="1100" dirty="0">
-                <a:solidFill>
-                  <a:srgbClr val="8B94A3"/>
-                </a:solidFill>
-                <a:latin typeface="Noto Sans SC" pitchFamily="34" charset="0"/>
-                <a:ea typeface="Noto Sans SC" pitchFamily="34" charset="-122"/>
-                <a:cs typeface="Noto Sans SC" pitchFamily="34" charset="-120"/>
-              </a:rPr>
-              <a:t>— tennis</a:t>
-            </a:r>
-            <a:endParaRPr lang="en-US" sz="1100" dirty="0"/>
-          </a:p>
-          <a:p>
-            <a:pPr algn="l" indent="0" marL="0">
-              <a:lnSpc>
-                <a:spcPts val="1705"/>
-              </a:lnSpc>
-              <a:buNone/>
-            </a:pPr>
-            <a:r>
-              <a:rPr lang="en-US" sz="1300" b="1" dirty="0">
-                <a:solidFill>
-                  <a:srgbClr val="C8943E"/>
-                </a:solidFill>
-                <a:latin typeface="Noto Sans SC" pitchFamily="34" charset="0"/>
-                <a:ea typeface="Noto Sans SC" pitchFamily="34" charset="-122"/>
-                <a:cs typeface="Noto Sans SC" pitchFamily="34" charset="-120"/>
-              </a:rPr>
-              <a:t>打网球</a:t>
-            </a:r>
-            <a:pPr algn="l" indent="0" marL="0">
-              <a:lnSpc>
-                <a:spcPts val="1705"/>
-              </a:lnSpc>
-              <a:buNone/>
-            </a:pPr>
-            <a:r>
-              <a:rPr lang="en-US" sz="1100" dirty="0">
-                <a:solidFill>
-                  <a:srgbClr val="1E2A38"/>
-                </a:solidFill>
-                <a:latin typeface="Noto Sans SC" pitchFamily="34" charset="0"/>
-                <a:ea typeface="Noto Sans SC" pitchFamily="34" charset="-122"/>
-                <a:cs typeface="Noto Sans SC" pitchFamily="34" charset="-120"/>
-              </a:rPr>
-              <a:t> </a:t>
-            </a:r>
-            <a:pPr algn="l" indent="0" marL="0">
-              <a:lnSpc>
-                <a:spcPts val="1705"/>
-              </a:lnSpc>
-              <a:buNone/>
-            </a:pPr>
-            <a:r>
-              <a:rPr lang="en-US" sz="1100" dirty="0">
-                <a:solidFill>
-                  <a:srgbClr val="3A7D8C"/>
-                </a:solidFill>
-                <a:latin typeface="Noto Sans SC" pitchFamily="34" charset="0"/>
-                <a:ea typeface="Noto Sans SC" pitchFamily="34" charset="-122"/>
-                <a:cs typeface="Noto Sans SC" pitchFamily="34" charset="-120"/>
-              </a:rPr>
-              <a:t>dǎ wǎngqiú</a:t>
-            </a:r>
-            <a:pPr algn="l" indent="0" marL="0">
-              <a:lnSpc>
-                <a:spcPts val="1705"/>
-              </a:lnSpc>
-              <a:buNone/>
-            </a:pPr>
-            <a:r>
-              <a:rPr lang="en-US" sz="1100" dirty="0">
-                <a:solidFill>
-                  <a:srgbClr val="1E2A38"/>
-                </a:solidFill>
-                <a:latin typeface="Noto Sans SC" pitchFamily="34" charset="0"/>
-                <a:ea typeface="Noto Sans SC" pitchFamily="34" charset="-122"/>
-                <a:cs typeface="Noto Sans SC" pitchFamily="34" charset="-120"/>
-              </a:rPr>
-              <a:t> </a:t>
-            </a:r>
-            <a:pPr algn="l" indent="0" marL="0">
-              <a:lnSpc>
-                <a:spcPts val="1705"/>
-              </a:lnSpc>
-              <a:buNone/>
-            </a:pPr>
             <a:r>
               <a:rPr lang="en-US" sz="1100" dirty="0">
                 <a:solidFill>
@@ -10474,12 +9928,6 @@
               </a:rPr>
               <a:t>🏃 </a:t>
             </a:r>
-            <a:pPr algn="l" indent="0" marL="0">
-              <a:lnSpc>
-                <a:spcPts val="1400"/>
-              </a:lnSpc>
-              <a:buNone/>
-            </a:pPr>
             <a:r>
               <a:rPr lang="en-US" sz="1000" b="1" dirty="0">
                 <a:solidFill>
@@ -10491,12 +9939,6 @@
               </a:rPr>
               <a:t>跑步</a:t>
             </a:r>
-            <a:pPr algn="l" indent="0" marL="0">
-              <a:lnSpc>
-                <a:spcPts val="1400"/>
-              </a:lnSpc>
-              <a:buNone/>
-            </a:pPr>
             <a:r>
               <a:rPr lang="en-US" sz="1000" dirty="0">
                 <a:solidFill>
@@ -11187,9 +10629,6 @@
               </a:rPr>
               <a:t>我喜欢</a:t>
             </a:r>
-            <a:pPr algn="l" indent="0" marL="0">
-              <a:buNone/>
-            </a:pPr>
             <a:r>
               <a:rPr lang="en-US" sz="1100" dirty="0">
                 <a:solidFill>
@@ -11311,9 +10750,6 @@
               </a:rPr>
               <a:t>我喜欢</a:t>
             </a:r>
-            <a:pPr algn="l" indent="0" marL="0">
-              <a:buNone/>
-            </a:pPr>
             <a:r>
               <a:rPr lang="en-US" sz="1100" dirty="0">
                 <a:solidFill>
@@ -11435,9 +10871,6 @@
               </a:rPr>
               <a:t>我喜欢</a:t>
             </a:r>
-            <a:pPr algn="l" indent="0" marL="0">
-              <a:buNone/>
-            </a:pPr>
             <a:r>
               <a:rPr lang="en-US" sz="1100" dirty="0">
                 <a:solidFill>
@@ -11559,9 +10992,6 @@
               </a:rPr>
               <a:t>我喜欢</a:t>
             </a:r>
-            <a:pPr algn="l" indent="0" marL="0">
-              <a:buNone/>
-            </a:pPr>
             <a:r>
               <a:rPr lang="en-US" sz="1100" dirty="0">
                 <a:solidFill>
@@ -11573,9 +11003,6 @@
               </a:rPr>
               <a:t>跟我的猫一起打网球！ </a:t>
             </a:r>
-            <a:pPr algn="l" indent="0" marL="0">
-              <a:buNone/>
-            </a:pPr>
             <a:r>
               <a:rPr lang="en-US" sz="750" b="1" dirty="0">
                 <a:solidFill>
@@ -11785,9 +11212,6 @@
               </a:rPr>
               <a:t>打网球 </a:t>
             </a:r>
-            <a:pPr algn="l" indent="0" marL="0">
-              <a:buNone/>
-            </a:pPr>
             <a:r>
               <a:rPr lang="en-US" sz="800" dirty="0">
                 <a:solidFill>
@@ -11916,9 +11340,6 @@
               </a:rPr>
               <a:t>跑步 · 游泳 </a:t>
             </a:r>
-            <a:pPr algn="l" indent="0" marL="0">
-              <a:buNone/>
-            </a:pPr>
             <a:r>
               <a:rPr lang="en-US" sz="800" dirty="0">
                 <a:solidFill>
@@ -12481,12 +11902,6 @@
               </a:rPr>
               <a:t>What's the verb for </a:t>
             </a:r>
-            <a:pPr algn="l" indent="0" marL="0">
-              <a:spcAft>
-                <a:spcPts val="300"/>
-              </a:spcAft>
-              <a:buNone/>
-            </a:pPr>
             <a:r>
               <a:rPr lang="en-US" sz="1300" b="1" dirty="0">
                 <a:solidFill>
@@ -12498,12 +11913,6 @@
               </a:rPr>
               <a:t>网球</a:t>
             </a:r>
-            <a:pPr algn="l" indent="0" marL="0">
-              <a:spcAft>
-                <a:spcPts val="300"/>
-              </a:spcAft>
-              <a:buNone/>
-            </a:pPr>
             <a:r>
               <a:rPr lang="en-US" sz="1200" dirty="0">
                 <a:solidFill>
@@ -12515,12 +11924,6 @@
               </a:rPr>
               <a:t>? </a:t>
             </a:r>
-            <a:pPr algn="l" indent="0" marL="0">
-              <a:spcAft>
-                <a:spcPts val="300"/>
-              </a:spcAft>
-              <a:buNone/>
-            </a:pPr>
             <a:r>
               <a:rPr lang="en-US" sz="950" b="1" dirty="0">
                 <a:solidFill>
@@ -12716,12 +12119,6 @@
               </a:rPr>
               <a:t>How do you say "swim" in Chinese? </a:t>
             </a:r>
-            <a:pPr algn="l" indent="0" marL="0">
-              <a:spcAft>
-                <a:spcPts val="300"/>
-              </a:spcAft>
-              <a:buNone/>
-            </a:pPr>
             <a:r>
               <a:rPr lang="en-US" sz="950" b="1" dirty="0">
                 <a:solidFill>
@@ -12917,12 +12314,6 @@
               </a:rPr>
               <a:t>Error check: </a:t>
             </a:r>
-            <a:pPr algn="l" indent="0" marL="0">
-              <a:spcAft>
-                <a:spcPts val="300"/>
-              </a:spcAft>
-              <a:buNone/>
-            </a:pPr>
             <a:r>
               <a:rPr lang="en-US" sz="1200" b="1" dirty="0">
                 <a:solidFill>
@@ -12934,12 +12325,6 @@
               </a:rPr>
               <a:t>我打跑步。</a:t>
             </a:r>
-            <a:pPr algn="l" indent="0" marL="0">
-              <a:spcAft>
-                <a:spcPts val="300"/>
-              </a:spcAft>
-              <a:buNone/>
-            </a:pPr>
             <a:r>
               <a:rPr lang="en-US" sz="1200" dirty="0">
                 <a:solidFill>
@@ -14468,15 +13853,6 @@
               </a:rPr>
               <a:t>Trace each of today's </a:t>
             </a:r>
-            <a:pPr algn="l" indent="0" marL="0">
-              <a:lnSpc>
-                <a:spcPts val="1283"/>
-              </a:lnSpc>
-              <a:spcAft>
-                <a:spcPts val="400"/>
-              </a:spcAft>
-              <a:buNone/>
-            </a:pPr>
             <a:r>
               <a:rPr lang="en-US" sz="950" b="1" dirty="0">
                 <a:solidFill>
@@ -14488,15 +13864,6 @@
               </a:rPr>
               <a:t>7 new words</a:t>
             </a:r>
-            <a:pPr algn="l" indent="0" marL="0">
-              <a:lnSpc>
-                <a:spcPts val="1283"/>
-              </a:lnSpc>
-              <a:spcAft>
-                <a:spcPts val="400"/>
-              </a:spcAft>
-              <a:buNone/>
-            </a:pPr>
             <a:r>
               <a:rPr lang="en-US" sz="950" dirty="0">
                 <a:solidFill>
@@ -14532,15 +13899,6 @@
               </a:rPr>
               <a:t>Complete the </a:t>
             </a:r>
-            <a:pPr algn="l" indent="0" marL="0">
-              <a:lnSpc>
-                <a:spcPts val="1283"/>
-              </a:lnSpc>
-              <a:spcAft>
-                <a:spcPts val="400"/>
-              </a:spcAft>
-              <a:buNone/>
-            </a:pPr>
             <a:r>
               <a:rPr lang="en-US" sz="950" b="1" dirty="0">
                 <a:solidFill>
@@ -14552,15 +13910,6 @@
               </a:rPr>
               <a:t>matching column</a:t>
             </a:r>
-            <a:pPr algn="l" indent="0" marL="0">
-              <a:lnSpc>
-                <a:spcPts val="1283"/>
-              </a:lnSpc>
-              <a:spcAft>
-                <a:spcPts val="400"/>
-              </a:spcAft>
-              <a:buNone/>
-            </a:pPr>
             <a:r>
               <a:rPr lang="en-US" sz="950" dirty="0">
                 <a:solidFill>
@@ -14596,15 +13945,6 @@
               </a:rPr>
               <a:t>Extension: cover the English column and </a:t>
             </a:r>
-            <a:pPr algn="l" indent="0" marL="0">
-              <a:lnSpc>
-                <a:spcPts val="1283"/>
-              </a:lnSpc>
-              <a:spcAft>
-                <a:spcPts val="400"/>
-              </a:spcAft>
-              <a:buNone/>
-            </a:pPr>
             <a:r>
               <a:rPr lang="en-US" sz="950" b="1" dirty="0">
                 <a:solidFill>
@@ -14732,6 +14072,20 @@
               </a:rPr>
               <a:t>运动 </a:t>
             </a:r>
+            <a:r>
+              <a:rPr lang="en-US" sz="800" dirty="0">
+                <a:solidFill>
+                  <a:srgbClr val="8B94A3"/>
+                </a:solidFill>
+                <a:latin typeface="Noto Sans SC" pitchFamily="34" charset="0"/>
+                <a:ea typeface="Noto Sans SC" pitchFamily="34" charset="-122"/>
+                <a:cs typeface="Noto Sans SC" pitchFamily="34" charset="-120"/>
+              </a:rPr>
+              <a:t>sports; exercise</a:t>
+            </a:r>
+            <a:endParaRPr lang="en-US" sz="950" dirty="0"/>
+          </a:p>
+          <a:p>
             <a:pPr algn="l" indent="0" marL="0">
               <a:lnSpc>
                 <a:spcPts val="1472"/>
@@ -14739,6 +14093,17 @@
               <a:buNone/>
             </a:pPr>
             <a:r>
+              <a:rPr lang="en-US" sz="950" dirty="0">
+                <a:solidFill>
+                  <a:srgbClr val="1E2A38"/>
+                </a:solidFill>
+                <a:latin typeface="Noto Sans SC" pitchFamily="34" charset="0"/>
+                <a:ea typeface="Noto Sans SC" pitchFamily="34" charset="-122"/>
+                <a:cs typeface="Noto Sans SC" pitchFamily="34" charset="-120"/>
+              </a:rPr>
+              <a:t>跑步 </a:t>
+            </a:r>
+            <a:r>
               <a:rPr lang="en-US" sz="800" dirty="0">
                 <a:solidFill>
                   <a:srgbClr val="8B94A3"/>
@@ -14747,7 +14112,7 @@
                 <a:ea typeface="Noto Sans SC" pitchFamily="34" charset="-122"/>
                 <a:cs typeface="Noto Sans SC" pitchFamily="34" charset="-120"/>
               </a:rPr>
-              <a:t>sports; exercise</a:t>
+              <a:t>run; jog</a:t>
             </a:r>
             <a:endParaRPr lang="en-US" sz="950" dirty="0"/>
           </a:p>
@@ -14767,8 +14132,22 @@
                 <a:ea typeface="Noto Sans SC" pitchFamily="34" charset="-122"/>
                 <a:cs typeface="Noto Sans SC" pitchFamily="34" charset="-120"/>
               </a:rPr>
-              <a:t>跑步 </a:t>
-            </a:r>
+              <a:t>游泳 </a:t>
+            </a:r>
+            <a:r>
+              <a:rPr lang="en-US" sz="800" dirty="0">
+                <a:solidFill>
+                  <a:srgbClr val="8B94A3"/>
+                </a:solidFill>
+                <a:latin typeface="Noto Sans SC" pitchFamily="34" charset="0"/>
+                <a:ea typeface="Noto Sans SC" pitchFamily="34" charset="-122"/>
+                <a:cs typeface="Noto Sans SC" pitchFamily="34" charset="-120"/>
+              </a:rPr>
+              <a:t>swim</a:t>
+            </a:r>
+            <a:endParaRPr lang="en-US" sz="950" dirty="0"/>
+          </a:p>
+          <a:p>
             <a:pPr algn="l" indent="0" marL="0">
               <a:lnSpc>
                 <a:spcPts val="1472"/>
@@ -14776,6 +14155,17 @@
               <a:buNone/>
             </a:pPr>
             <a:r>
+              <a:rPr lang="en-US" sz="950" dirty="0">
+                <a:solidFill>
+                  <a:srgbClr val="1E2A38"/>
+                </a:solidFill>
+                <a:latin typeface="Noto Sans SC" pitchFamily="34" charset="0"/>
+                <a:ea typeface="Noto Sans SC" pitchFamily="34" charset="-122"/>
+                <a:cs typeface="Noto Sans SC" pitchFamily="34" charset="-120"/>
+              </a:rPr>
+              <a:t>一起 </a:t>
+            </a:r>
+            <a:r>
               <a:rPr lang="en-US" sz="800" dirty="0">
                 <a:solidFill>
                   <a:srgbClr val="8B94A3"/>
@@ -14784,7 +14174,7 @@
                 <a:ea typeface="Noto Sans SC" pitchFamily="34" charset="-122"/>
                 <a:cs typeface="Noto Sans SC" pitchFamily="34" charset="-120"/>
               </a:rPr>
-              <a:t>run; jog</a:t>
+              <a:t>together</a:t>
             </a:r>
             <a:endParaRPr lang="en-US" sz="950" dirty="0"/>
           </a:p>
@@ -14804,8 +14194,22 @@
                 <a:ea typeface="Noto Sans SC" pitchFamily="34" charset="-122"/>
                 <a:cs typeface="Noto Sans SC" pitchFamily="34" charset="-120"/>
               </a:rPr>
-              <a:t>游泳 </a:t>
-            </a:r>
+              <a:t>跟……一起 </a:t>
+            </a:r>
+            <a:r>
+              <a:rPr lang="en-US" sz="800" dirty="0">
+                <a:solidFill>
+                  <a:srgbClr val="8B94A3"/>
+                </a:solidFill>
+                <a:latin typeface="Noto Sans SC" pitchFamily="34" charset="0"/>
+                <a:ea typeface="Noto Sans SC" pitchFamily="34" charset="-122"/>
+                <a:cs typeface="Noto Sans SC" pitchFamily="34" charset="-120"/>
+              </a:rPr>
+              <a:t>together with</a:t>
+            </a:r>
+            <a:endParaRPr lang="en-US" sz="950" dirty="0"/>
+          </a:p>
+          <a:p>
             <a:pPr algn="l" indent="0" marL="0">
               <a:lnSpc>
                 <a:spcPts val="1472"/>
@@ -14813,6 +14217,17 @@
               <a:buNone/>
             </a:pPr>
             <a:r>
+              <a:rPr lang="en-US" sz="950" dirty="0">
+                <a:solidFill>
+                  <a:srgbClr val="1E2A38"/>
+                </a:solidFill>
+                <a:latin typeface="Noto Sans SC" pitchFamily="34" charset="0"/>
+                <a:ea typeface="Noto Sans SC" pitchFamily="34" charset="-122"/>
+                <a:cs typeface="Noto Sans SC" pitchFamily="34" charset="-120"/>
+              </a:rPr>
+              <a:t>网球 </a:t>
+            </a:r>
+            <a:r>
               <a:rPr lang="en-US" sz="800" dirty="0">
                 <a:solidFill>
                   <a:srgbClr val="8B94A3"/>
@@ -14821,7 +14236,7 @@
                 <a:ea typeface="Noto Sans SC" pitchFamily="34" charset="-122"/>
                 <a:cs typeface="Noto Sans SC" pitchFamily="34" charset="-120"/>
               </a:rPr>
-              <a:t>swim</a:t>
+              <a:t>tennis</a:t>
             </a:r>
             <a:endParaRPr lang="en-US" sz="950" dirty="0"/>
           </a:p>
@@ -14841,125 +14256,8 @@
                 <a:ea typeface="Noto Sans SC" pitchFamily="34" charset="-122"/>
                 <a:cs typeface="Noto Sans SC" pitchFamily="34" charset="-120"/>
               </a:rPr>
-              <a:t>一起 </a:t>
-            </a:r>
-            <a:pPr algn="l" indent="0" marL="0">
-              <a:lnSpc>
-                <a:spcPts val="1472"/>
-              </a:lnSpc>
-              <a:buNone/>
-            </a:pPr>
-            <a:r>
-              <a:rPr lang="en-US" sz="800" dirty="0">
-                <a:solidFill>
-                  <a:srgbClr val="8B94A3"/>
-                </a:solidFill>
-                <a:latin typeface="Noto Sans SC" pitchFamily="34" charset="0"/>
-                <a:ea typeface="Noto Sans SC" pitchFamily="34" charset="-122"/>
-                <a:cs typeface="Noto Sans SC" pitchFamily="34" charset="-120"/>
-              </a:rPr>
-              <a:t>together</a:t>
-            </a:r>
-            <a:endParaRPr lang="en-US" sz="950" dirty="0"/>
-          </a:p>
-          <a:p>
-            <a:pPr algn="l" indent="0" marL="0">
-              <a:lnSpc>
-                <a:spcPts val="1472"/>
-              </a:lnSpc>
-              <a:buNone/>
-            </a:pPr>
-            <a:r>
-              <a:rPr lang="en-US" sz="950" dirty="0">
-                <a:solidFill>
-                  <a:srgbClr val="1E2A38"/>
-                </a:solidFill>
-                <a:latin typeface="Noto Sans SC" pitchFamily="34" charset="0"/>
-                <a:ea typeface="Noto Sans SC" pitchFamily="34" charset="-122"/>
-                <a:cs typeface="Noto Sans SC" pitchFamily="34" charset="-120"/>
-              </a:rPr>
-              <a:t>跟……一起 </a:t>
-            </a:r>
-            <a:pPr algn="l" indent="0" marL="0">
-              <a:lnSpc>
-                <a:spcPts val="1472"/>
-              </a:lnSpc>
-              <a:buNone/>
-            </a:pPr>
-            <a:r>
-              <a:rPr lang="en-US" sz="800" dirty="0">
-                <a:solidFill>
-                  <a:srgbClr val="8B94A3"/>
-                </a:solidFill>
-                <a:latin typeface="Noto Sans SC" pitchFamily="34" charset="0"/>
-                <a:ea typeface="Noto Sans SC" pitchFamily="34" charset="-122"/>
-                <a:cs typeface="Noto Sans SC" pitchFamily="34" charset="-120"/>
-              </a:rPr>
-              <a:t>together with</a:t>
-            </a:r>
-            <a:endParaRPr lang="en-US" sz="950" dirty="0"/>
-          </a:p>
-          <a:p>
-            <a:pPr algn="l" indent="0" marL="0">
-              <a:lnSpc>
-                <a:spcPts val="1472"/>
-              </a:lnSpc>
-              <a:buNone/>
-            </a:pPr>
-            <a:r>
-              <a:rPr lang="en-US" sz="950" dirty="0">
-                <a:solidFill>
-                  <a:srgbClr val="1E2A38"/>
-                </a:solidFill>
-                <a:latin typeface="Noto Sans SC" pitchFamily="34" charset="0"/>
-                <a:ea typeface="Noto Sans SC" pitchFamily="34" charset="-122"/>
-                <a:cs typeface="Noto Sans SC" pitchFamily="34" charset="-120"/>
-              </a:rPr>
-              <a:t>网球 </a:t>
-            </a:r>
-            <a:pPr algn="l" indent="0" marL="0">
-              <a:lnSpc>
-                <a:spcPts val="1472"/>
-              </a:lnSpc>
-              <a:buNone/>
-            </a:pPr>
-            <a:r>
-              <a:rPr lang="en-US" sz="800" dirty="0">
-                <a:solidFill>
-                  <a:srgbClr val="8B94A3"/>
-                </a:solidFill>
-                <a:latin typeface="Noto Sans SC" pitchFamily="34" charset="0"/>
-                <a:ea typeface="Noto Sans SC" pitchFamily="34" charset="-122"/>
-                <a:cs typeface="Noto Sans SC" pitchFamily="34" charset="-120"/>
-              </a:rPr>
-              <a:t>tennis</a:t>
-            </a:r>
-            <a:endParaRPr lang="en-US" sz="950" dirty="0"/>
-          </a:p>
-          <a:p>
-            <a:pPr algn="l" indent="0" marL="0">
-              <a:lnSpc>
-                <a:spcPts val="1472"/>
-              </a:lnSpc>
-              <a:buNone/>
-            </a:pPr>
-            <a:r>
-              <a:rPr lang="en-US" sz="950" dirty="0">
-                <a:solidFill>
-                  <a:srgbClr val="1E2A38"/>
-                </a:solidFill>
-                <a:latin typeface="Noto Sans SC" pitchFamily="34" charset="0"/>
-                <a:ea typeface="Noto Sans SC" pitchFamily="34" charset="-122"/>
-                <a:cs typeface="Noto Sans SC" pitchFamily="34" charset="-120"/>
-              </a:rPr>
               <a:t>打网球 </a:t>
             </a:r>
-            <a:pPr algn="l" indent="0" marL="0">
-              <a:lnSpc>
-                <a:spcPts val="1472"/>
-              </a:lnSpc>
-              <a:buNone/>
-            </a:pPr>
             <a:r>
               <a:rPr lang="en-US" sz="800" dirty="0">
                 <a:solidFill>
@@ -15936,15 +15234,6 @@
               </a:rPr>
               <a:t>Teacher calls out a sport — </a:t>
             </a:r>
-            <a:pPr algn="l" indent="0" marL="0">
-              <a:lnSpc>
-                <a:spcPts val="1283"/>
-              </a:lnSpc>
-              <a:spcAft>
-                <a:spcPts val="400"/>
-              </a:spcAft>
-              <a:buNone/>
-            </a:pPr>
             <a:r>
               <a:rPr lang="en-US" sz="950" b="1" dirty="0">
                 <a:solidFill>
@@ -15956,15 +15245,6 @@
               </a:rPr>
               <a:t>跑步, 游泳,</a:t>
             </a:r>
-            <a:pPr algn="l" indent="0" marL="0">
-              <a:lnSpc>
-                <a:spcPts val="1283"/>
-              </a:lnSpc>
-              <a:spcAft>
-                <a:spcPts val="400"/>
-              </a:spcAft>
-              <a:buNone/>
-            </a:pPr>
             <a:r>
               <a:rPr lang="en-US" sz="950" dirty="0">
                 <a:solidFill>
@@ -15976,15 +15256,6 @@
               </a:rPr>
               <a:t> or </a:t>
             </a:r>
-            <a:pPr algn="l" indent="0" marL="0">
-              <a:lnSpc>
-                <a:spcPts val="1283"/>
-              </a:lnSpc>
-              <a:spcAft>
-                <a:spcPts val="400"/>
-              </a:spcAft>
-              <a:buNone/>
-            </a:pPr>
             <a:r>
               <a:rPr lang="en-US" sz="950" b="1" dirty="0">
                 <a:solidFill>
@@ -16020,15 +15291,6 @@
               </a:rPr>
               <a:t>Students write "</a:t>
             </a:r>
-            <a:pPr algn="l" indent="0" marL="0">
-              <a:lnSpc>
-                <a:spcPts val="1283"/>
-              </a:lnSpc>
-              <a:spcAft>
-                <a:spcPts val="400"/>
-              </a:spcAft>
-              <a:buNone/>
-            </a:pPr>
             <a:r>
               <a:rPr lang="en-US" sz="950" b="1" dirty="0">
                 <a:solidFill>
@@ -16040,15 +15302,6 @@
               </a:rPr>
               <a:t>打 + word</a:t>
             </a:r>
-            <a:pPr algn="l" indent="0" marL="0">
-              <a:lnSpc>
-                <a:spcPts val="1283"/>
-              </a:lnSpc>
-              <a:spcAft>
-                <a:spcPts val="400"/>
-              </a:spcAft>
-              <a:buNone/>
-            </a:pPr>
             <a:r>
               <a:rPr lang="en-US" sz="950" dirty="0">
                 <a:solidFill>
@@ -16060,15 +15313,6 @@
               </a:rPr>
               <a:t>" or "</a:t>
             </a:r>
-            <a:pPr algn="l" indent="0" marL="0">
-              <a:lnSpc>
-                <a:spcPts val="1283"/>
-              </a:lnSpc>
-              <a:spcAft>
-                <a:spcPts val="400"/>
-              </a:spcAft>
-              <a:buNone/>
-            </a:pPr>
             <a:r>
               <a:rPr lang="en-US" sz="950" b="1" dirty="0">
                 <a:solidFill>
@@ -16080,15 +15324,6 @@
               </a:rPr>
               <a:t>no verb</a:t>
             </a:r>
-            <a:pPr algn="l" indent="0" marL="0">
-              <a:lnSpc>
-                <a:spcPts val="1283"/>
-              </a:lnSpc>
-              <a:spcAft>
-                <a:spcPts val="400"/>
-              </a:spcAft>
-              <a:buNone/>
-            </a:pPr>
             <a:r>
               <a:rPr lang="en-US" sz="950" dirty="0">
                 <a:solidFill>
@@ -16124,15 +15359,6 @@
               </a:rPr>
               <a:t>Hold up on the </a:t>
             </a:r>
-            <a:pPr algn="l" indent="0" marL="0">
-              <a:lnSpc>
-                <a:spcPts val="1283"/>
-              </a:lnSpc>
-              <a:spcAft>
-                <a:spcPts val="400"/>
-              </a:spcAft>
-              <a:buNone/>
-            </a:pPr>
             <a:r>
               <a:rPr lang="en-US" sz="950" b="1" dirty="0">
                 <a:solidFill>
@@ -16144,15 +15370,6 @@
               </a:rPr>
               <a:t>count of three</a:t>
             </a:r>
-            <a:pPr algn="l" indent="0" marL="0">
-              <a:lnSpc>
-                <a:spcPts val="1283"/>
-              </a:lnSpc>
-              <a:spcAft>
-                <a:spcPts val="400"/>
-              </a:spcAft>
-              <a:buNone/>
-            </a:pPr>
             <a:r>
               <a:rPr lang="en-US" sz="950" dirty="0">
                 <a:solidFill>
@@ -16188,15 +15405,6 @@
               </a:rPr>
               <a:t>Extension: write the </a:t>
             </a:r>
-            <a:pPr algn="l" indent="0" marL="0">
-              <a:lnSpc>
-                <a:spcPts val="1283"/>
-              </a:lnSpc>
-              <a:spcAft>
-                <a:spcPts val="400"/>
-              </a:spcAft>
-              <a:buNone/>
-            </a:pPr>
             <a:r>
               <a:rPr lang="en-US" sz="950" b="1" dirty="0">
                 <a:solidFill>
@@ -16208,15 +15416,6 @@
               </a:rPr>
               <a:t>full sentence</a:t>
             </a:r>
-            <a:pPr algn="l" indent="0" marL="0">
-              <a:lnSpc>
-                <a:spcPts val="1283"/>
-              </a:lnSpc>
-              <a:spcAft>
-                <a:spcPts val="400"/>
-              </a:spcAft>
-              <a:buNone/>
-            </a:pPr>
             <a:r>
               <a:rPr lang="en-US" sz="950" dirty="0">
                 <a:solidFill>
